--- a/презентация/Тілашар-қорғау.pptx
+++ b/презентация/Тілашар-қорғау.pptx
@@ -520,12 +520,18 @@
           </a:p>
           <a:p>
             <a:r>
-              <a:t>для изучения казахского языка — «Тілашар». Оно рассчитано на учеников</a:t>
-            </a:r>
-          </a:p>
-          <a:p>
-            <a:r>
-              <a:t>с 5 по 11 класс.</a:t>
+              <a:t>для изучения грамматики казахского языка — «Тілашар».</a:t>
+            </a:r>
+          </a:p>
+          <a:p/>
+          <a:p>
+            <a:r>
+              <a:t>Эта версия сделана по заданию моего учителя казахского языка: она дала</a:t>
+            </a:r>
+          </a:p>
+          <a:p>
+            <a:r>
+              <a:t>темы и образец заданий — сначала диалог, потом правило, потом задание.</a:t>
             </a:r>
           </a:p>
           <a:p/>
@@ -633,7 +639,12 @@
           </a:p>
           <a:p>
             <a:r>
-              <a:t>содержание уроков, проверка и все решения.</a:t>
+              <a:t>проверка и все решения. Тексты пяти заданий написала учитель, остальные</a:t>
+            </a:r>
+          </a:p>
+          <a:p>
+            <a:r>
+              <a:t>десять составлены по её образцу и сверены с учебником.</a:t>
             </a:r>
           </a:p>
         </p:txBody>
@@ -703,39 +714,23 @@
           <a:lstStyle/>
           <a:p>
             <a:r>
-              <a:t>Не говорить «Duolingo плохой». Говорить: он рассчитан на языки с большой</a:t>
-            </a:r>
-          </a:p>
-          <a:p>
-            <a:r>
-              <a:t>аудиторией, и это нормально. Место для казахского осталось пустым — его</a:t>
-            </a:r>
-          </a:p>
-          <a:p>
-            <a:r>
-              <a:t>я и попробовал занять.</a:t>
+              <a:t>Не говорить «учебник плохой». Говорить: учебник и учитель дают правило,</a:t>
+            </a:r>
+          </a:p>
+          <a:p>
+            <a:r>
+              <a:t>а приложение помогает закрепить его сразу, пока тема свежая.</a:t>
             </a:r>
           </a:p>
           <a:p/>
           <a:p>
             <a:r>
-              <a:t>Главная мысль слайда: приложение должно усилить интерес к языку и дать</a:t>
-            </a:r>
-          </a:p>
-          <a:p>
-            <a:r>
-              <a:t>больше практики, а не заменить учителя.</a:t>
-            </a:r>
-          </a:p>
-          <a:p/>
-          <a:p>
-            <a:r>
-              <a:t>Список курсов я проверил на их сайте и поставил дату. Если жюри захочет —</a:t>
-            </a:r>
-          </a:p>
-          <a:p>
-            <a:r>
-              <a:t>можно открыть сайт прямо сейчас.</a:t>
+              <a:t>Главная мысль слайда: приложение не заменяет учителя. Оно повторяет его</a:t>
+            </a:r>
+          </a:p>
+          <a:p>
+            <a:r>
+              <a:t>тему и его порядок урока — диалог, правило, задание.</a:t>
             </a:r>
           </a:p>
         </p:txBody>
@@ -805,28 +800,33 @@
           <a:lstStyle/>
           <a:p>
             <a:r>
-              <a:t>Не перечислять все пять — назвать «Учиться» и «Практику», остальное видно</a:t>
-            </a:r>
-          </a:p>
-          <a:p>
-            <a:r>
-              <a:t>на слайде.</a:t>
+              <a:t>Главное на этом слайде — порядок: диалог, правило, задание. Он такой же,</a:t>
+            </a:r>
+          </a:p>
+          <a:p>
+            <a:r>
+              <a:t>как в первой версии, которая победила на школьной олимпиаде.</a:t>
             </a:r>
           </a:p>
           <a:p/>
           <a:p>
             <a:r>
-              <a:t>Смысл: это не список уроков, а курс на весь учебный год с тремя уровнями —</a:t>
-            </a:r>
-          </a:p>
-          <a:p>
-            <a:r>
-              <a:t>5–7, 7–9 и 9–11 класс. Уровень подсказывает, откуда начать, но ничего</a:t>
-            </a:r>
-          </a:p>
-          <a:p>
-            <a:r>
-              <a:t>не запирает: перейти можно в одно касание.</a:t>
+              <a:t>Про цифры внизу. Пять заданий написала учитель, я перенёс их дословно.</a:t>
+            </a:r>
+          </a:p>
+          <a:p>
+            <a:r>
+              <a:t>При сверке с учебником в них нашлось девять мест, которые нужно было</a:t>
+            </a:r>
+          </a:p>
+          <a:p>
+            <a:r>
+              <a:t>поправить, — каждое исправление записано вместе с источником и отправлено</a:t>
+            </a:r>
+          </a:p>
+          <a:p>
+            <a:r>
+              <a:t>учителю. Ещё десять заданий по остальным темам составлены по её образцу.</a:t>
             </a:r>
           </a:p>
         </p:txBody>
@@ -912,28 +912,23 @@
           </a:p>
           <a:p>
             <a:r>
-              <a:t>результат и найти причину, если что-то не работает. В первой версии такой</a:t>
-            </a:r>
-          </a:p>
-          <a:p>
-            <a:r>
-              <a:t>проверки не было, и часть задуманного просто не работала. Поэтому во второй</a:t>
-            </a:r>
-          </a:p>
-          <a:p>
-            <a:r>
-              <a:t>версии приложение проверяет себя само при каждом изменении.</a:t>
+              <a:t>результат и найти причину, если что-то не работает. Поэтому приложение</a:t>
+            </a:r>
+          </a:p>
+          <a:p>
+            <a:r>
+              <a:t>проверяет себя само при каждом изменении — в том числе сверяет текст</a:t>
+            </a:r>
+          </a:p>
+          <a:p>
+            <a:r>
+              <a:t>учителя с её документом слово в слово, чтобы ничего не исказилось.</a:t>
             </a:r>
           </a:p>
           <a:p/>
           <a:p>
             <a:r>
-              <a:t>Про деньги: все сервисы бесплатные. Это важно — значит, повторить может</a:t>
-            </a:r>
-          </a:p>
-          <a:p>
-            <a:r>
-              <a:t>любой школьник.</a:t>
+              <a:t>Про деньги: все сервисы бесплатные. Значит, повторить может любой школьник.</a:t>
             </a:r>
           </a:p>
         </p:txBody>
@@ -1003,7 +998,7 @@
           <a:lstStyle/>
           <a:p>
             <a:r>
-              <a:t>Это ядро доклада. Не читать по пунктам — рассказать про первый и третий,</a:t>
+              <a:t>Это ядро доклада. Не читать по пунктам — рассказать про второй и третий,</a:t>
             </a:r>
           </a:p>
           <a:p>
@@ -1014,33 +1009,33 @@
           <a:p/>
           <a:p>
             <a:r>
-              <a:t>Про первый сделать паузу: в казахском есть буквы, которых физически нет</a:t>
-            </a:r>
-          </a:p>
-          <a:p>
-            <a:r>
-              <a:t>на русской клавиатуре. Обычный тренажёр сравнивает ответ буква в букву,</a:t>
-            </a:r>
-          </a:p>
-          <a:p>
-            <a:r>
-              <a:t>и ученик получает «неверно» за правильный ответ. Именно из-за этого первую</a:t>
-            </a:r>
-          </a:p>
-          <a:p>
-            <a:r>
-              <a:t>версию бросали.</a:t>
+              <a:t>Про второй: учитель просила, чтобы персонаж двигался или говорил. Теперь</a:t>
+            </a:r>
+          </a:p>
+          <a:p>
+            <a:r>
+              <a:t>Айша и учитель произносят каждую реплику казахским голосом, а пока голос</a:t>
+            </a:r>
+          </a:p>
+          <a:p>
+            <a:r>
+              <a:t>звучит, персонаж покачивается.</a:t>
             </a:r>
           </a:p>
           <a:p/>
           <a:p>
             <a:r>
-              <a:t>Про третий: приложение само помнит, что начинает забываться, и возвращает</a:t>
-            </a:r>
-          </a:p>
-          <a:p>
-            <a:r>
-              <a:t>это задание. Ученику не нужно решать, что повторять.</a:t>
+              <a:t>Про третий: в задании, где нужно отметить несколько ответов, нельзя</a:t>
+            </a:r>
+          </a:p>
+          <a:p>
+            <a:r>
+              <a:t>просто нажать всё подряд. Засчитывается только точный набор: пропустил</a:t>
+            </a:r>
+          </a:p>
+          <a:p>
+            <a:r>
+              <a:t>верный вариант или отметил лишний — ошибка.</a:t>
             </a:r>
           </a:p>
         </p:txBody>
@@ -1115,7 +1110,7 @@
           </a:p>
           <a:p>
             <a:r>
-              <a:t>выбрать короткий урок, проверить, что телефон заряжен.</a:t>
+              <a:t>проверить звук, проверить, что телефон заряжен.</a:t>
             </a:r>
           </a:p>
           <a:p/>
@@ -1126,38 +1121,33 @@
           </a:p>
           <a:p>
             <a:r>
-              <a:t>1. Дорожку уроков — видно, где я сейчас.</a:t>
-            </a:r>
-          </a:p>
-          <a:p>
-            <a:r>
-              <a:t>2. Открыть урок, дойти до задания.</a:t>
-            </a:r>
-          </a:p>
-          <a:p>
-            <a:r>
-              <a:t>3. Набрать ответ РУССКИМИ буквами — например «аке» вместо «әке».</a:t>
-            </a:r>
-          </a:p>
-          <a:p>
-            <a:r>
-              <a:t>   Приложение ответит «Грамматика верна» и покажет правильное написание.</a:t>
-            </a:r>
-          </a:p>
-          <a:p>
-            <a:r>
-              <a:t>   Это и есть главное.</a:t>
-            </a:r>
-          </a:p>
-          <a:p>
-            <a:r>
-              <a:t>4. Показать ряд казахских букв под полем.</a:t>
+              <a:t>1. Список тем — они в том порядке, в каком их дала учитель.</a:t>
+            </a:r>
+          </a:p>
+          <a:p>
+            <a:r>
+              <a:t>2. Открыть «Сын есім», нажать «послушать» у реплики Айши и учителя.</a:t>
+            </a:r>
+          </a:p>
+          <a:p>
+            <a:r>
+              <a:t>3. Перейти к правилу, потом к заданию, выбрать ответ «сары».</a:t>
+            </a:r>
+          </a:p>
+          <a:p>
+            <a:r>
+              <a:t>4. Во втором задании отметить «үлкен» и «биік» и нажать «Тексеру».</a:t>
+            </a:r>
+          </a:p>
+          <a:p>
+            <a:r>
+              <a:t>5. Нажать «Рус» — показать, что под казахским текстом появился перевод.</a:t>
             </a:r>
           </a:p>
           <a:p/>
           <a:p>
             <a:r>
-              <a:t>Запасной вариант, если проектор не покажет телефон: слайды с картинками.</a:t>
+              <a:t>Запасной вариант, если проектор не покажет телефон: ролик из комплекта.</a:t>
             </a:r>
           </a:p>
         </p:txBody>
@@ -1233,33 +1223,23 @@
           <a:p/>
           <a:p>
             <a:r>
-              <a:t>Порядок такой. Сначала коротко: тексты проверил учитель, ребята уже</a:t>
-            </a:r>
-          </a:p>
-          <a:p>
-            <a:r>
-              <a:t>позанимались, приложение работает. Потом — куда это может вырасти.</a:t>
-            </a:r>
-          </a:p>
-          <a:p>
-            <a:r>
-              <a:t>И в конце прямая просьба: дайте классы для апробации и методистов.</a:t>
+              <a:t>Порядок такой. Сначала коротко, что уже сделано. Потом — куда это может</a:t>
+            </a:r>
+          </a:p>
+          <a:p>
+            <a:r>
+              <a:t>вырасти. И в конце прямая просьба: дайте классы для апробации и методистов.</a:t>
             </a:r>
           </a:p>
           <a:p/>
           <a:p>
             <a:r>
-              <a:t>Главная мысль на прощание: казахский не сложнее других языков. Ученику</a:t>
-            </a:r>
-          </a:p>
-          <a:p>
-            <a:r>
-              <a:t>мешало то, что он не мог нажать нужную букву. Это я убрал — дальше нужно,</a:t>
-            </a:r>
-          </a:p>
-          <a:p>
-            <a:r>
-              <a:t>чтобы приложением пользовалась не одна школа.</a:t>
+              <a:t>Главная мысль на прощание: учитель даёт тему, а приложение помогает</a:t>
+            </a:r>
+          </a:p>
+          <a:p>
+            <a:r>
+              <a:t>закрепить её сразу — дома, в дороге, без интернета.</a:t>
             </a:r>
           </a:p>
           <a:p/>
@@ -1276,17 +1256,17 @@
           </a:p>
           <a:p>
             <a:r>
-              <a:t>Убедиться, что учитель действительно посмотрел тексты, и вписать его ФИО</a:t>
-            </a:r>
-          </a:p>
-          <a:p>
-            <a:r>
-              <a:t>в тексты.py (TEACHER_RU / TEACHER_KZ). Раздать ссылку одноклассникам</a:t>
-            </a:r>
-          </a:p>
-          <a:p>
-            <a:r>
-              <a:t>и вписать их число (TESTERS) — живое число убеждает сильнее слов.</a:t>
+              <a:t>Когда учитель посмотрит тексты, вписать её ФИО в тексты.py</a:t>
+            </a:r>
+          </a:p>
+          <a:p>
+            <a:r>
+              <a:t>(TEACHER_RU / TEACHER_KZ). Раздать ссылку одноклассникам и вписать</a:t>
+            </a:r>
+          </a:p>
+          <a:p>
+            <a:r>
+              <a:t>их число (TESTERS) — живое число убеждает сильнее слов.</a:t>
             </a:r>
           </a:p>
           <a:p/>
@@ -1303,86 +1283,66 @@
           </a:p>
           <a:p>
             <a:r>
-              <a:t>   Код помогала писать нейросеть. Я ставил задачу, проверял результат</a:t>
-            </a:r>
-          </a:p>
-          <a:p>
-            <a:r>
-              <a:t>   и искал причину, если что-то не работало. Содержание уроков и все</a:t>
-            </a:r>
-          </a:p>
-          <a:p>
-            <a:r>
-              <a:t>   решения — мои.</a:t>
+              <a:t>   Нейросеть писала код. Я ставил задачу, проверял результат и решал,</a:t>
+            </a:r>
+          </a:p>
+          <a:p>
+            <a:r>
+              <a:t>   что оставить, а что убрать.</a:t>
             </a:r>
           </a:p>
           <a:p/>
           <a:p>
             <a:r>
-              <a:t>2. «Чем это отличается от прошлогодней работы?»</a:t>
-            </a:r>
-          </a:p>
-          <a:p>
-            <a:r>
-              <a:t>   Тогда я показывал замысел, и он победил. Сейчас показываю работающее</a:t>
-            </a:r>
-          </a:p>
-          <a:p>
-            <a:r>
-              <a:t>   приложение, которое проверил учитель и попробовали одноклассники.</a:t>
+              <a:t>2. «Кто проверял казахский текст?»</a:t>
+            </a:r>
+          </a:p>
+          <a:p>
+            <a:r>
+              <a:t>   Пять заданий написала учитель. Остальные составлены по её образцу,</a:t>
+            </a:r>
+          </a:p>
+          <a:p>
+            <a:r>
+              <a:t>   сверены с учебником «Бәйшешек» и отправлены ей на проверку.</a:t>
             </a:r>
           </a:p>
           <a:p/>
           <a:p>
             <a:r>
-              <a:t>3. «Кто проверял казахский текст?»</a:t>
-            </a:r>
-          </a:p>
-          <a:p>
-            <a:r>
-              <a:t>   Учитель казахского языка. Тексты выгружаются из приложения одним</a:t>
-            </a:r>
-          </a:p>
-          <a:p>
-            <a:r>
-              <a:t>   файлом — так проверять удобно, и так же будут проверяться новые уроки.</a:t>
+              <a:t>3. «Откуда картинки?»</a:t>
+            </a:r>
+          </a:p>
+          <a:p>
+            <a:r>
+              <a:t>   Персонажи нарисованы нейросетью специально для приложения.</a:t>
             </a:r>
           </a:p>
           <a:p/>
           <a:p>
             <a:r>
-              <a:t>4. «Результаты апробации есть?»</a:t>
-            </a:r>
-          </a:p>
-          <a:p>
-            <a:r>
-              <a:t>   Одноклассники позанимались и сказали, что мешает — это я исправил.</a:t>
-            </a:r>
-          </a:p>
-          <a:p>
-            <a:r>
-              <a:t>   Настоящая апробация на классе с цифрами — следующий шаг, сбор данных</a:t>
-            </a:r>
-          </a:p>
-          <a:p>
-            <a:r>
-              <a:t>   в приложение уже встроен. Придумывать проценты я не стал.</a:t>
+              <a:t>4. «Почему всего семь тем?»</a:t>
+            </a:r>
+          </a:p>
+          <a:p>
+            <a:r>
+              <a:t>   Это темы, которые дала учитель. Добавить новую тему просто —</a:t>
+            </a:r>
+          </a:p>
+          <a:p>
+            <a:r>
+              <a:t>   это первый пункт плана развития.</a:t>
             </a:r>
           </a:p>
           <a:p/>
           <a:p>
             <a:r>
-              <a:t>5. «Приложение платное?»</a:t>
-            </a:r>
-          </a:p>
-          <a:p>
-            <a:r>
-              <a:t>   Нет. Открывается по ссылке, работает без интернета, ставится на телефон.</a:t>
-            </a:r>
-          </a:p>
-          <a:p>
-            <a:r>
-              <a:t>   Все сервисы, на которых оно сделано, тоже бесплатные.</a:t>
+              <a:t>5. «Работает без интернета?»</a:t>
+            </a:r>
+          </a:p>
+          <a:p>
+            <a:r>
+              <a:t>   Да. Можно включить на телефоне режим полёта и показать.</a:t>
             </a:r>
           </a:p>
           <a:p/>
@@ -8539,8 +8499,8 @@
         </p:nvSpPr>
         <p:spPr>
           <a:xfrm>
-            <a:off x="749808" y="3224540"/>
-            <a:ext cx="10692079" cy="1030102"/>
+            <a:off x="749808" y="3250448"/>
+            <a:ext cx="10692079" cy="800168"/>
           </a:xfrm>
           <a:prstGeom prst="rect">
             <a:avLst/>
@@ -8555,11 +8515,11 @@
           <a:p>
             <a:pPr algn="l">
               <a:lnSpc>
-                <a:spcPts val="5712"/>
-              </a:lnSpc>
-            </a:pPr>
-            <a:r>
-              <a:rPr sz="5600" spc="-157">
+                <a:spcPts val="4437"/>
+              </a:lnSpc>
+            </a:pPr>
+            <a:r>
+              <a:rPr sz="4350" spc="-122">
                 <a:solidFill>
                   <a:srgbClr val="EEEBE5"/>
                 </a:solidFill>
@@ -8567,7 +8527,7 @@
                 <a:cs typeface="GQ Text Bold"/>
                 <a:ea typeface="GQ Text Bold"/>
               </a:rPr>
-              <a:t>қазақ тілі қадам сайын</a:t>
+              <a:t>қазақ тілі грамматикасы үш қадамда</a:t>
             </a:r>
           </a:p>
         </p:txBody>
@@ -8580,8 +8540,8 @@
         </p:nvSpPr>
         <p:spPr>
           <a:xfrm>
-            <a:off x="749808" y="4297680"/>
-            <a:ext cx="7484455" cy="645414"/>
+            <a:off x="749808" y="4135754"/>
+            <a:ext cx="7484455" cy="912114"/>
           </a:xfrm>
           <a:prstGeom prst="rect">
             <a:avLst/>
@@ -8608,7 +8568,7 @@
                 <a:cs typeface="GQ Text"/>
                 <a:ea typeface="GQ Text"/>
               </a:rPr>
-              <a:t>Орысша сөйлейтін және қазақ тілін үйренетін 5–11 сынып оқушыларына</a:t>
+              <a:t>Қазақ тілі мұғалімінің тапсырмасы бойынша жасалған қосымша: диалог,</a:t>
             </a:r>
           </a:p>
           <a:p>
@@ -8626,7 +8586,25 @@
                 <a:cs typeface="GQ Text"/>
                 <a:ea typeface="GQ Text"/>
               </a:rPr>
-              <a:t>арналған қосымша. Тегін, сілтеме арқылы ашылады.</a:t>
+              <a:t>ереже, тапсырма. Орыс тілінде оқитын мектептердің оқушыларына</a:t>
+            </a:r>
+          </a:p>
+          <a:p>
+            <a:pPr algn="l">
+              <a:lnSpc>
+                <a:spcPts val="2100"/>
+              </a:lnSpc>
+            </a:pPr>
+            <a:r>
+              <a:rPr sz="1450">
+                <a:solidFill>
+                  <a:srgbClr val="B6BCC4"/>
+                </a:solidFill>
+                <a:latin typeface="GQ Text"/>
+                <a:cs typeface="GQ Text"/>
+                <a:ea typeface="GQ Text"/>
+              </a:rPr>
+              <a:t>арналған. Тегін, сілтеме арқылы ашылады.</a:t>
             </a:r>
           </a:p>
         </p:txBody>
@@ -8697,7 +8675,7 @@
                 <a:cs typeface="GQ Text Bold"/>
                 <a:ea typeface="GQ Text Bold"/>
               </a:rPr>
-              <a:t>26</a:t>
+              <a:t>7</a:t>
             </a:r>
           </a:p>
         </p:txBody>
@@ -8738,7 +8716,7 @@
                 <a:cs typeface="IBM Plex Mono Medium"/>
                 <a:ea typeface="IBM Plex Mono Medium"/>
               </a:rPr>
-              <a:t>САБАҚ</a:t>
+              <a:t>ТАҚЫРЫП</a:t>
             </a:r>
           </a:p>
         </p:txBody>
@@ -8779,7 +8757,7 @@
                 <a:cs typeface="GQ Text Bold"/>
                 <a:ea typeface="GQ Text Bold"/>
               </a:rPr>
-              <a:t>225</a:t>
+              <a:t>15</a:t>
             </a:r>
           </a:p>
         </p:txBody>
@@ -8861,7 +8839,7 @@
                 <a:cs typeface="GQ Text Bold"/>
                 <a:ea typeface="GQ Text Bold"/>
               </a:rPr>
-              <a:t>7</a:t>
+              <a:t>47</a:t>
             </a:r>
           </a:p>
         </p:txBody>
@@ -8902,7 +8880,7 @@
                 <a:cs typeface="IBM Plex Mono Medium"/>
                 <a:ea typeface="IBM Plex Mono Medium"/>
               </a:rPr>
-              <a:t>ЖАТТЫҒУ ТҮРІ</a:t>
+              <a:t>ДЫБЫС ЖАЗБАСЫ</a:t>
             </a:r>
           </a:p>
         </p:txBody>
@@ -8943,7 +8921,7 @@
                 <a:cs typeface="GQ Text Bold"/>
                 <a:ea typeface="GQ Text Bold"/>
               </a:rPr>
-              <a:t>5–11</a:t>
+              <a:t>3</a:t>
             </a:r>
           </a:p>
         </p:txBody>
@@ -8984,7 +8962,7 @@
                 <a:cs typeface="IBM Plex Mono Medium"/>
                 <a:ea typeface="IBM Plex Mono Medium"/>
               </a:rPr>
-              <a:t>СЫНЫПТАР</a:t>
+              <a:t>ҚАДАМ ӘР ТАПСЫРМАДА</a:t>
             </a:r>
           </a:p>
         </p:txBody>
@@ -9991,7 +9969,7 @@
                 <a:cs typeface="GQ Text"/>
                 <a:ea typeface="GQ Text"/>
               </a:rPr>
-              <a:t>26 сабақ және 225</a:t>
+              <a:t>7 тақырып және 15</a:t>
             </a:r>
           </a:p>
           <a:p>
@@ -10335,7 +10313,7 @@
                 <a:cs typeface="GQ Text"/>
                 <a:ea typeface="GQ Text"/>
               </a:rPr>
-              <a:t>Бұл — екінші, қайта</a:t>
+              <a:t>Үшінші нұсқа — мұғалімнің</a:t>
             </a:r>
           </a:p>
           <a:p>
@@ -10353,7 +10331,7 @@
                 <a:cs typeface="GQ Text"/>
                 <a:ea typeface="GQ Text"/>
               </a:rPr>
-              <a:t>жасалған нұсқа</a:t>
+              <a:t>тапсырмасы бойынша</a:t>
             </a:r>
           </a:p>
         </p:txBody>
@@ -10679,7 +10657,7 @@
                 <a:cs typeface="GQ Text"/>
                 <a:ea typeface="GQ Text"/>
               </a:rPr>
-              <a:t>Кез келген мектептің 5–11</a:t>
+              <a:t>Телефонда да, компьютерде</a:t>
             </a:r>
           </a:p>
           <a:p>
@@ -10697,7 +10675,7 @@
                 <a:cs typeface="GQ Text"/>
                 <a:ea typeface="GQ Text"/>
               </a:rPr>
-              <a:t>сынып оқушысына</a:t>
+              <a:t>де, интернетсіз</a:t>
             </a:r>
           </a:p>
         </p:txBody>
@@ -10830,7 +10808,7 @@
         <p:spPr>
           <a:xfrm>
             <a:off x="6196431" y="2964688"/>
-            <a:ext cx="5245455" cy="1463039"/>
+            <a:ext cx="5245455" cy="1234439"/>
           </a:xfrm>
           <a:prstGeom prst="rect">
             <a:avLst/>
@@ -10862,7 +10840,7 @@
         <p:spPr>
           <a:xfrm>
             <a:off x="749808" y="2964688"/>
-            <a:ext cx="5245455" cy="1513840"/>
+            <a:ext cx="5245455" cy="1272539"/>
           </a:xfrm>
           <a:prstGeom prst="rect">
             <a:avLst/>
@@ -10894,7 +10872,7 @@
         <p:spPr>
           <a:xfrm>
             <a:off x="749808" y="2964688"/>
-            <a:ext cx="32004" cy="1513840"/>
+            <a:ext cx="32004" cy="1272539"/>
           </a:xfrm>
           <a:prstGeom prst="rect">
             <a:avLst/>
@@ -11063,7 +11041,7 @@
                 <a:cs typeface="GQ Text Bold"/>
                 <a:ea typeface="GQ Text Bold"/>
               </a:rPr>
-              <a:t>Қазақ тілін әр мектепте оқиды, ал жаттығуға</a:t>
+              <a:t>Грамматиканы әр мектепте оқиды, ал</a:t>
             </a:r>
           </a:p>
           <a:p>
@@ -11081,7 +11059,7 @@
                 <a:cs typeface="GQ Text Bold"/>
                 <a:ea typeface="GQ Text Bold"/>
               </a:rPr>
-              <a:t>ыңғайлы орын жоқ</a:t>
+              <a:t>ережені бірден бекітетін орын жоқ</a:t>
             </a:r>
           </a:p>
         </p:txBody>
@@ -11184,7 +11162,7 @@
         <p:spPr>
           <a:xfrm>
             <a:off x="1005840" y="3200400"/>
-            <a:ext cx="4733391" cy="1066546"/>
+            <a:ext cx="4733391" cy="825246"/>
           </a:xfrm>
           <a:prstGeom prst="rect">
             <a:avLst/>
@@ -11211,7 +11189,7 @@
                 <a:cs typeface="GQ Text SemiBold"/>
                 <a:ea typeface="GQ Text SemiBold"/>
               </a:rPr>
-              <a:t>Тіл көлеммен емес, қайталаумен беріледі: күн сайынғы</a:t>
+              <a:t>Оқулықта ереже мысалдан бөлек тұрады, ал оқушы</a:t>
             </a:r>
           </a:p>
           <a:p>
@@ -11229,7 +11207,7 @@
                 <a:cs typeface="GQ Text SemiBold"/>
                 <a:ea typeface="GQ Text SemiBold"/>
               </a:rPr>
-              <a:t>он минут аптасына бір рет отыратын екі сағаттан көп</a:t>
+              <a:t>жауабының дұрыс-бұрыстығын мұғалім тексергенде</a:t>
             </a:r>
           </a:p>
           <a:p>
@@ -11247,25 +11225,7 @@
                 <a:cs typeface="GQ Text SemiBold"/>
                 <a:ea typeface="GQ Text SemiBold"/>
               </a:rPr>
-              <a:t>нәтиже береді. Ол үшін телефон өте қолайлы — ол</a:t>
-            </a:r>
-          </a:p>
-          <a:p>
-            <a:pPr algn="l">
-              <a:lnSpc>
-                <a:spcPts val="1900"/>
-              </a:lnSpc>
-            </a:pPr>
-            <a:r>
-              <a:rPr sz="1300">
-                <a:solidFill>
-                  <a:srgbClr val="1B222B"/>
-                </a:solidFill>
-                <a:latin typeface="GQ Text SemiBold"/>
-                <a:cs typeface="GQ Text SemiBold"/>
-                <a:ea typeface="GQ Text SemiBold"/>
-              </a:rPr>
-              <a:t>әрқашан қасында.</a:t>
+              <a:t>ғана біледі. Келесі сабаққа дейін қате бекіп үлгереді.</a:t>
             </a:r>
           </a:p>
         </p:txBody>
@@ -11279,7 +11239,7 @@
         <p:spPr>
           <a:xfrm>
             <a:off x="6452463" y="3202432"/>
-            <a:ext cx="4733391" cy="1010412"/>
+            <a:ext cx="4733391" cy="781812"/>
           </a:xfrm>
           <a:prstGeom prst="rect">
             <a:avLst/>
@@ -11306,7 +11266,7 @@
                 <a:cs typeface="GQ Text"/>
                 <a:ea typeface="GQ Text"/>
               </a:rPr>
-              <a:t>Бірақ түсіндірмесі орысша, ал үйрететіні қазақша</a:t>
+              <a:t>Қосымшада ереже бірден қысқа диалогта көрсетіледі, ал</a:t>
             </a:r>
           </a:p>
           <a:p>
@@ -11324,7 +11284,7 @@
                 <a:cs typeface="GQ Text"/>
                 <a:ea typeface="GQ Text"/>
               </a:rPr>
-              <a:t>жаттықтырғыштар жоқтың қасы. duolingo.com сайтында</a:t>
+              <a:t>жауап сол сәтте тексеріледі: қате болса, оқушы дұрыс</a:t>
             </a:r>
           </a:p>
           <a:p>
@@ -11342,17 +11302,40 @@
                 <a:cs typeface="GQ Text"/>
                 <a:ea typeface="GQ Text"/>
               </a:rPr>
-              <a:t>орысша білетіндерге тоғыз тіл қолжетімді — олардың</a:t>
-            </a:r>
-          </a:p>
-          <a:p>
-            <a:pPr algn="l">
-              <a:lnSpc>
-                <a:spcPts val="1800"/>
-              </a:lnSpc>
-            </a:pPr>
-            <a:r>
-              <a:rPr sz="1250">
+              <a:t>нұсқаны көреді.</a:t>
+            </a:r>
+          </a:p>
+        </p:txBody>
+      </p:sp>
+      <p:sp>
+        <p:nvSpPr>
+          <p:cNvPr id="14" name="TextBox 13"/>
+          <p:cNvSpPr txBox="1"/>
+          <p:nvPr/>
+        </p:nvSpPr>
+        <p:spPr>
+          <a:xfrm>
+            <a:off x="749808" y="6285788"/>
+            <a:ext cx="10692079" cy="209194"/>
+          </a:xfrm>
+          <a:prstGeom prst="rect">
+            <a:avLst/>
+          </a:prstGeom>
+          <a:noFill/>
+        </p:spPr>
+        <p:txBody>
+          <a:bodyPr wrap="none" lIns="0" rIns="0" tIns="0" bIns="0" anchor="t">
+            <a:spAutoFit/>
+          </a:bodyPr>
+          <a:lstStyle/>
+          <a:p>
+            <a:pPr algn="l">
+              <a:lnSpc>
+                <a:spcPts val="1160"/>
+              </a:lnSpc>
+            </a:pPr>
+            <a:r>
+              <a:rPr sz="850">
                 <a:solidFill>
                   <a:srgbClr val="535C66"/>
                 </a:solidFill>
@@ -11360,48 +11343,7 @@
                 <a:cs typeface="GQ Text"/>
                 <a:ea typeface="GQ Text"/>
               </a:rPr>
-              <a:t>ішінде қазақ тілі жоқ. Оқулық пен дәптер ғана қалады.</a:t>
-            </a:r>
-          </a:p>
-        </p:txBody>
-      </p:sp>
-      <p:sp>
-        <p:nvSpPr>
-          <p:cNvPr id="14" name="TextBox 13"/>
-          <p:cNvSpPr txBox="1"/>
-          <p:nvPr/>
-        </p:nvSpPr>
-        <p:spPr>
-          <a:xfrm>
-            <a:off x="749808" y="6285788"/>
-            <a:ext cx="10692079" cy="209194"/>
-          </a:xfrm>
-          <a:prstGeom prst="rect">
-            <a:avLst/>
-          </a:prstGeom>
-          <a:noFill/>
-        </p:spPr>
-        <p:txBody>
-          <a:bodyPr wrap="none" lIns="0" rIns="0" tIns="0" bIns="0" anchor="t">
-            <a:spAutoFit/>
-          </a:bodyPr>
-          <a:lstStyle/>
-          <a:p>
-            <a:pPr algn="l">
-              <a:lnSpc>
-                <a:spcPts val="1160"/>
-              </a:lnSpc>
-            </a:pPr>
-            <a:r>
-              <a:rPr sz="850">
-                <a:solidFill>
-                  <a:srgbClr val="535C66"/>
-                </a:solidFill>
-                <a:latin typeface="GQ Text"/>
-                <a:cs typeface="GQ Text"/>
-                <a:ea typeface="GQ Text"/>
-              </a:rPr>
-              <a:t>Дереккөз: duolingo.com/courses, «Орыс тілін білетіндерге арналған курстар» бөлімі. 25.08.2026 тексерілді.</a:t>
+              <a:t>Тақырыптар мен сабақтың тәртібі — қазақ тілі мұғалімінің тапсырмасы бойынша. Ережелер 5 және 6-сыныпқа арналған «Бәйшешек» оқулығымен салыстырылды.</a:t>
             </a:r>
           </a:p>
         </p:txBody>
@@ -11574,8 +11516,8 @@
         </p:nvSpPr>
         <p:spPr>
           <a:xfrm>
-            <a:off x="749808" y="794115"/>
-            <a:ext cx="10692079" cy="742910"/>
+            <a:off x="749808" y="790854"/>
+            <a:ext cx="10692079" cy="771855"/>
           </a:xfrm>
           <a:prstGeom prst="rect">
             <a:avLst/>
@@ -11590,11 +11532,11 @@
           <a:p>
             <a:pPr algn="l">
               <a:lnSpc>
-                <a:spcPts val="4120"/>
-              </a:lnSpc>
-            </a:pPr>
-            <a:r>
-              <a:rPr sz="3850" spc="-85">
+                <a:spcPts val="4280"/>
+              </a:lnSpc>
+            </a:pPr>
+            <a:r>
+              <a:rPr sz="4000" spc="-88">
                 <a:solidFill>
                   <a:srgbClr val="EEEBE5"/>
                 </a:solidFill>
@@ -11602,7 +11544,7 @@
                 <a:cs typeface="GQ Text Bold"/>
                 <a:ea typeface="GQ Text Bold"/>
               </a:rPr>
-              <a:t>Бес бөлім және әрқайсысына түсінікті экран</a:t>
+              <a:t>Үш экран және мұғалімнің жеті тақырыбы</a:t>
             </a:r>
           </a:p>
         </p:txBody>
@@ -11615,7 +11557,7 @@
         </p:nvSpPr>
         <p:spPr>
           <a:xfrm>
-            <a:off x="749808" y="1509793"/>
+            <a:off x="749808" y="1530177"/>
             <a:ext cx="9195188" cy="567349"/>
           </a:xfrm>
           <a:prstGeom prst="rect">
@@ -11643,7 +11585,7 @@
                 <a:cs typeface="GQ Text"/>
                 <a:ea typeface="GQ Text"/>
               </a:rPr>
-              <a:t>Оқушы қосымшаны ашқанда қай жерде тоқтағанын және әрі қарай не істеу керегін бірден көреді. Мәзірді</a:t>
+              <a:t>Оқушы қосымшаны ашып, тақырыпты таңдайды да, оны қадам-қадаммен өтеді. Артық бөлім жоқ — тек</a:t>
             </a:r>
           </a:p>
           <a:p>
@@ -11661,7 +11603,7 @@
                 <a:cs typeface="GQ Text"/>
                 <a:ea typeface="GQ Text"/>
               </a:rPr>
-              <a:t>зерттеудің қажеті жоқ.</a:t>
+              <a:t>грамматика.</a:t>
             </a:r>
           </a:p>
         </p:txBody>
@@ -11674,7 +11616,7 @@
         </p:nvSpPr>
         <p:spPr>
           <a:xfrm>
-            <a:off x="749808" y="2253932"/>
+            <a:off x="749808" y="2274316"/>
             <a:ext cx="10692079" cy="7315"/>
           </a:xfrm>
           <a:prstGeom prst="rect">
@@ -11704,7 +11646,7 @@
         </p:nvSpPr>
         <p:spPr>
           <a:xfrm>
-            <a:off x="749808" y="2528415"/>
+            <a:off x="749808" y="2548798"/>
             <a:ext cx="1962851" cy="323169"/>
           </a:xfrm>
           <a:prstGeom prst="rect">
@@ -11732,7 +11674,7 @@
                 <a:cs typeface="GQ Text Bold"/>
                 <a:ea typeface="GQ Text Bold"/>
               </a:rPr>
-              <a:t>Оқу</a:t>
+              <a:t>Бастапқы экран</a:t>
             </a:r>
           </a:p>
         </p:txBody>
@@ -11745,8 +11687,8 @@
         </p:nvSpPr>
         <p:spPr>
           <a:xfrm>
-            <a:off x="749808" y="2889948"/>
-            <a:ext cx="1962851" cy="461010"/>
+            <a:off x="749808" y="2910332"/>
+            <a:ext cx="1962851" cy="651509"/>
           </a:xfrm>
           <a:prstGeom prst="rect">
             <a:avLst/>
@@ -11773,7 +11715,7 @@
                 <a:cs typeface="GQ Text"/>
                 <a:ea typeface="GQ Text"/>
               </a:rPr>
-              <a:t>Сабақ жолы: өтілгені мен</a:t>
+              <a:t>Айша мен мұғалім,</a:t>
             </a:r>
           </a:p>
           <a:p>
@@ -11791,7 +11733,25 @@
                 <a:cs typeface="GQ Text"/>
                 <a:ea typeface="GQ Text"/>
               </a:rPr>
-              <a:t>келесі қадам көрініп тұрады</a:t>
+              <a:t>тапсырманың құрылымы,</a:t>
+            </a:r>
+          </a:p>
+          <a:p>
+            <a:pPr algn="l">
+              <a:lnSpc>
+                <a:spcPts val="1500"/>
+              </a:lnSpc>
+            </a:pPr>
+            <a:r>
+              <a:rPr sz="1050">
+                <a:solidFill>
+                  <a:srgbClr val="A6ADB6"/>
+                </a:solidFill>
+                <a:latin typeface="GQ Text"/>
+                <a:cs typeface="GQ Text"/>
+                <a:ea typeface="GQ Text"/>
+              </a:rPr>
+              <a:t>тілді өзгерту</a:t>
             </a:r>
           </a:p>
         </p:txBody>
@@ -11804,7 +11764,7 @@
         </p:nvSpPr>
         <p:spPr>
           <a:xfrm>
-            <a:off x="2932115" y="2528415"/>
+            <a:off x="2932115" y="2548798"/>
             <a:ext cx="1962851" cy="323169"/>
           </a:xfrm>
           <a:prstGeom prst="rect">
@@ -11832,7 +11792,7 @@
                 <a:cs typeface="GQ Text Bold"/>
                 <a:ea typeface="GQ Text Bold"/>
               </a:rPr>
-              <a:t>Жаттығу</a:t>
+              <a:t>Тақырыптар</a:t>
             </a:r>
           </a:p>
         </p:txBody>
@@ -11845,7 +11805,7 @@
         </p:nvSpPr>
         <p:spPr>
           <a:xfrm>
-            <a:off x="2932115" y="2889948"/>
+            <a:off x="2932115" y="2910332"/>
             <a:ext cx="1962851" cy="651509"/>
           </a:xfrm>
           <a:prstGeom prst="rect">
@@ -11873,7 +11833,7 @@
                 <a:cs typeface="GQ Text"/>
                 <a:ea typeface="GQ Text"/>
               </a:rPr>
-              <a:t>Күнделікті мақсат, қайталау,</a:t>
+              <a:t>Мұғалімнің парақшасындағы</a:t>
             </a:r>
           </a:p>
           <a:p>
@@ -11891,7 +11851,7 @@
                 <a:cs typeface="GQ Text"/>
                 <a:ea typeface="GQ Text"/>
               </a:rPr>
-              <a:t>сөз карточкалары, 60</a:t>
+              <a:t>ретпен жеті тақырып,</a:t>
             </a:r>
           </a:p>
           <a:p>
@@ -11909,7 +11869,7 @@
                 <a:cs typeface="GQ Text"/>
                 <a:ea typeface="GQ Text"/>
               </a:rPr>
-              <a:t>секундтық спринт</a:t>
+              <a:t>өтілгені белгіленеді</a:t>
             </a:r>
           </a:p>
         </p:txBody>
@@ -11922,7 +11882,7 @@
         </p:nvSpPr>
         <p:spPr>
           <a:xfrm>
-            <a:off x="5114422" y="2528415"/>
+            <a:off x="5114422" y="2548798"/>
             <a:ext cx="1962851" cy="323169"/>
           </a:xfrm>
           <a:prstGeom prst="rect">
@@ -11950,7 +11910,7 @@
                 <a:cs typeface="GQ Text Bold"/>
                 <a:ea typeface="GQ Text Bold"/>
               </a:rPr>
-              <a:t>Сөздік</a:t>
+              <a:t>Диалог</a:t>
             </a:r>
           </a:p>
         </p:txBody>
@@ -11963,8 +11923,8 @@
         </p:nvSpPr>
         <p:spPr>
           <a:xfrm>
-            <a:off x="5114422" y="2889948"/>
-            <a:ext cx="1962851" cy="842010"/>
+            <a:off x="5114422" y="2910332"/>
+            <a:ext cx="1962851" cy="651509"/>
           </a:xfrm>
           <a:prstGeom prst="rect">
             <a:avLst/>
@@ -11991,7 +11951,7 @@
                 <a:cs typeface="GQ Text"/>
                 <a:ea typeface="GQ Text"/>
               </a:rPr>
-              <a:t>Сабақтардан алынған 162</a:t>
+              <a:t>Тақырып бойынша қысқа</a:t>
             </a:r>
           </a:p>
           <a:p>
@@ -12009,7 +11969,7 @@
                 <a:cs typeface="GQ Text"/>
                 <a:ea typeface="GQ Text"/>
               </a:rPr>
-              <a:t>сөз, іздеу орыс</a:t>
+              <a:t>сөйлесу, әр реплика</a:t>
             </a:r>
           </a:p>
           <a:p>
@@ -12027,9 +11987,73 @@
                 <a:cs typeface="GQ Text"/>
                 <a:ea typeface="GQ Text"/>
               </a:rPr>
-              <a:t>пернетақтасынан да жұмыс</a:t>
-            </a:r>
-          </a:p>
+              <a:t>дыбысталған</a:t>
+            </a:r>
+          </a:p>
+        </p:txBody>
+      </p:sp>
+      <p:sp>
+        <p:nvSpPr>
+          <p:cNvPr id="15" name="TextBox 14"/>
+          <p:cNvSpPr txBox="1"/>
+          <p:nvPr/>
+        </p:nvSpPr>
+        <p:spPr>
+          <a:xfrm>
+            <a:off x="7296729" y="2548798"/>
+            <a:ext cx="1962851" cy="323169"/>
+          </a:xfrm>
+          <a:prstGeom prst="rect">
+            <a:avLst/>
+          </a:prstGeom>
+          <a:noFill/>
+        </p:spPr>
+        <p:txBody>
+          <a:bodyPr wrap="none" lIns="0" rIns="0" tIns="0" bIns="0" anchor="t">
+            <a:spAutoFit/>
+          </a:bodyPr>
+          <a:lstStyle/>
+          <a:p>
+            <a:pPr algn="l">
+              <a:lnSpc>
+                <a:spcPts val="1792"/>
+              </a:lnSpc>
+            </a:pPr>
+            <a:r>
+              <a:rPr sz="1600" spc="-24">
+                <a:solidFill>
+                  <a:srgbClr val="EEEBE5"/>
+                </a:solidFill>
+                <a:latin typeface="GQ Text Bold"/>
+                <a:cs typeface="GQ Text Bold"/>
+                <a:ea typeface="GQ Text Bold"/>
+              </a:rPr>
+              <a:t>Ереже</a:t>
+            </a:r>
+          </a:p>
+        </p:txBody>
+      </p:sp>
+      <p:sp>
+        <p:nvSpPr>
+          <p:cNvPr id="16" name="TextBox 15"/>
+          <p:cNvSpPr txBox="1"/>
+          <p:nvPr/>
+        </p:nvSpPr>
+        <p:spPr>
+          <a:xfrm>
+            <a:off x="7296729" y="2910332"/>
+            <a:ext cx="1962851" cy="461010"/>
+          </a:xfrm>
+          <a:prstGeom prst="rect">
+            <a:avLst/>
+          </a:prstGeom>
+          <a:noFill/>
+        </p:spPr>
+        <p:txBody>
+          <a:bodyPr wrap="none" lIns="0" rIns="0" tIns="0" bIns="0" anchor="t">
+            <a:spAutoFit/>
+          </a:bodyPr>
+          <a:lstStyle/>
           <a:p>
             <a:pPr algn="l">
               <a:lnSpc>
@@ -12045,20 +12069,38 @@
                 <a:cs typeface="GQ Text"/>
                 <a:ea typeface="GQ Text"/>
               </a:rPr>
-              <a:t>істейді</a:t>
-            </a:r>
-          </a:p>
-        </p:txBody>
-      </p:sp>
-      <p:sp>
-        <p:nvSpPr>
-          <p:cNvPr id="15" name="TextBox 14"/>
+              <a:t>Оқулықпен салыстырылған</a:t>
+            </a:r>
+          </a:p>
+          <a:p>
+            <a:pPr algn="l">
+              <a:lnSpc>
+                <a:spcPts val="1500"/>
+              </a:lnSpc>
+            </a:pPr>
+            <a:r>
+              <a:rPr sz="1050">
+                <a:solidFill>
+                  <a:srgbClr val="A6ADB6"/>
+                </a:solidFill>
+                <a:latin typeface="GQ Text"/>
+                <a:cs typeface="GQ Text"/>
+                <a:ea typeface="GQ Text"/>
+              </a:rPr>
+              <a:t>тақырып ережесі</a:t>
+            </a:r>
+          </a:p>
+        </p:txBody>
+      </p:sp>
+      <p:sp>
+        <p:nvSpPr>
+          <p:cNvPr id="17" name="TextBox 16"/>
           <p:cNvSpPr txBox="1"/>
           <p:nvPr/>
         </p:nvSpPr>
         <p:spPr>
           <a:xfrm>
-            <a:off x="7296729" y="2528415"/>
+            <a:off x="9479036" y="2548798"/>
             <a:ext cx="1962851" cy="323169"/>
           </a:xfrm>
           <a:prstGeom prst="rect">
@@ -12086,21 +12128,21 @@
                 <a:cs typeface="GQ Text Bold"/>
                 <a:ea typeface="GQ Text Bold"/>
               </a:rPr>
-              <a:t>Анықтама</a:t>
-            </a:r>
-          </a:p>
-        </p:txBody>
-      </p:sp>
-      <p:sp>
-        <p:nvSpPr>
-          <p:cNvPr id="16" name="TextBox 15"/>
+              <a:t>Тапсырма</a:t>
+            </a:r>
+          </a:p>
+        </p:txBody>
+      </p:sp>
+      <p:sp>
+        <p:nvSpPr>
+          <p:cNvPr id="18" name="TextBox 17"/>
           <p:cNvSpPr txBox="1"/>
           <p:nvPr/>
         </p:nvSpPr>
         <p:spPr>
           <a:xfrm>
-            <a:off x="7296729" y="2889948"/>
-            <a:ext cx="1962851" cy="461010"/>
+            <a:off x="9479036" y="2910332"/>
+            <a:ext cx="1962851" cy="651509"/>
           </a:xfrm>
           <a:prstGeom prst="rect">
             <a:avLst/>
@@ -12127,7 +12169,7 @@
                 <a:cs typeface="GQ Text"/>
                 <a:ea typeface="GQ Text"/>
               </a:rPr>
-              <a:t>33 ереже, 22 тақырып және</a:t>
+              <a:t>Жауапты таңдау, бірден</a:t>
             </a:r>
           </a:p>
           <a:p>
@@ -12145,21 +12187,69 @@
                 <a:cs typeface="GQ Text"/>
                 <a:ea typeface="GQ Text"/>
               </a:rPr>
-              <a:t>жанды жалғау кестелері</a:t>
-            </a:r>
-          </a:p>
-        </p:txBody>
-      </p:sp>
-      <p:sp>
-        <p:nvSpPr>
-          <p:cNvPr id="17" name="TextBox 16"/>
+              <a:t>тексеру, тақырып</a:t>
+            </a:r>
+          </a:p>
+          <a:p>
+            <a:pPr algn="l">
+              <a:lnSpc>
+                <a:spcPts val="1500"/>
+              </a:lnSpc>
+            </a:pPr>
+            <a:r>
+              <a:rPr sz="1050">
+                <a:solidFill>
+                  <a:srgbClr val="A6ADB6"/>
+                </a:solidFill>
+                <a:latin typeface="GQ Text"/>
+                <a:cs typeface="GQ Text"/>
+                <a:ea typeface="GQ Text"/>
+              </a:rPr>
+              <a:t>қорытындысы</a:t>
+            </a:r>
+          </a:p>
+        </p:txBody>
+      </p:sp>
+      <p:sp>
+        <p:nvSpPr>
+          <p:cNvPr id="19" name="Rectangle 18"/>
+          <p:cNvSpPr/>
+          <p:nvPr/>
+        </p:nvSpPr>
+        <p:spPr>
+          <a:xfrm>
+            <a:off x="749808" y="3932936"/>
+            <a:ext cx="10692079" cy="710247"/>
+          </a:xfrm>
+          <a:prstGeom prst="rect">
+            <a:avLst/>
+          </a:prstGeom>
+          <a:solidFill>
+            <a:srgbClr val="0064B9"/>
+          </a:solidFill>
+          <a:ln>
+            <a:noFill/>
+          </a:ln>
+          <a:effectLst/>
+        </p:spPr>
+        <p:txBody>
+          <a:bodyPr rtlCol="0" anchor="ctr" wrap="none"/>
+          <a:lstStyle/>
+          <a:p>
+            <a:pPr algn="ctr"/>
+          </a:p>
+        </p:txBody>
+      </p:sp>
+      <p:sp>
+        <p:nvSpPr>
+          <p:cNvPr id="20" name="TextBox 19"/>
           <p:cNvSpPr txBox="1"/>
           <p:nvPr/>
         </p:nvSpPr>
         <p:spPr>
           <a:xfrm>
-            <a:off x="9479036" y="2528415"/>
-            <a:ext cx="1962851" cy="323169"/>
+            <a:off x="1024127" y="4132021"/>
+            <a:ext cx="10143439" cy="345281"/>
           </a:xfrm>
           <a:prstGeom prst="rect">
             <a:avLst/>
@@ -12174,11 +12264,52 @@
           <a:p>
             <a:pPr algn="l">
               <a:lnSpc>
-                <a:spcPts val="1792"/>
-              </a:lnSpc>
-            </a:pPr>
-            <a:r>
-              <a:rPr sz="1600" spc="-24">
+                <a:spcPts val="1812"/>
+              </a:lnSpc>
+            </a:pPr>
+            <a:r>
+              <a:rPr sz="1250">
+                <a:solidFill>
+                  <a:srgbClr val="FFFFFF"/>
+                </a:solidFill>
+                <a:latin typeface="GQ Text SemiBold"/>
+                <a:cs typeface="GQ Text SemiBold"/>
+                <a:ea typeface="GQ Text SemiBold"/>
+              </a:rPr>
+              <a:t>47 дыбыс жазбасы, сөйлейтін кейіпкерлер, түйме арқылы орысша аударма және интернетсіз жұмыс.</a:t>
+            </a:r>
+          </a:p>
+        </p:txBody>
+      </p:sp>
+      <p:sp>
+        <p:nvSpPr>
+          <p:cNvPr id="21" name="TextBox 20"/>
+          <p:cNvSpPr txBox="1"/>
+          <p:nvPr/>
+        </p:nvSpPr>
+        <p:spPr>
+          <a:xfrm>
+            <a:off x="749808" y="5105829"/>
+            <a:ext cx="2383219" cy="600892"/>
+          </a:xfrm>
+          <a:prstGeom prst="rect">
+            <a:avLst/>
+          </a:prstGeom>
+          <a:noFill/>
+        </p:spPr>
+        <p:txBody>
+          <a:bodyPr wrap="none" lIns="0" rIns="0" tIns="0" bIns="0" anchor="t">
+            <a:spAutoFit/>
+          </a:bodyPr>
+          <a:lstStyle/>
+          <a:p>
+            <a:pPr algn="l">
+              <a:lnSpc>
+                <a:spcPts val="3332"/>
+              </a:lnSpc>
+            </a:pPr>
+            <a:r>
+              <a:rPr sz="3400" spc="-102">
                 <a:solidFill>
                   <a:srgbClr val="EEEBE5"/>
                 </a:solidFill>
@@ -12186,21 +12317,21 @@
                 <a:cs typeface="GQ Text Bold"/>
                 <a:ea typeface="GQ Text Bold"/>
               </a:rPr>
-              <a:t>Профиль</a:t>
-            </a:r>
-          </a:p>
-        </p:txBody>
-      </p:sp>
-      <p:sp>
-        <p:nvSpPr>
-          <p:cNvPr id="18" name="TextBox 17"/>
+              <a:t>5</a:t>
+            </a:r>
+          </a:p>
+        </p:txBody>
+      </p:sp>
+      <p:sp>
+        <p:nvSpPr>
+          <p:cNvPr id="22" name="TextBox 21"/>
           <p:cNvSpPr txBox="1"/>
           <p:nvPr/>
         </p:nvSpPr>
         <p:spPr>
           <a:xfrm>
-            <a:off x="9479036" y="2889948"/>
-            <a:ext cx="1962851" cy="651509"/>
+            <a:off x="749808" y="5663755"/>
+            <a:ext cx="2383219" cy="216408"/>
           </a:xfrm>
           <a:prstGeom prst="rect">
             <a:avLst/>
@@ -12215,99 +12346,33 @@
           <a:p>
             <a:pPr algn="l">
               <a:lnSpc>
-                <a:spcPts val="1500"/>
-              </a:lnSpc>
-            </a:pPr>
-            <a:r>
-              <a:rPr sz="1050">
+                <a:spcPts val="1200"/>
+              </a:lnSpc>
+            </a:pPr>
+            <a:r>
+              <a:rPr sz="800" spc="64">
                 <a:solidFill>
                   <a:srgbClr val="A6ADB6"/>
                 </a:solidFill>
-                <a:latin typeface="GQ Text"/>
-                <a:cs typeface="GQ Text"/>
-                <a:ea typeface="GQ Text"/>
-              </a:rPr>
-              <a:t>Статистика, марапаттар</a:t>
-            </a:r>
-          </a:p>
-          <a:p>
-            <a:pPr algn="l">
-              <a:lnSpc>
-                <a:spcPts val="1500"/>
-              </a:lnSpc>
-            </a:pPr>
-            <a:r>
-              <a:rPr sz="1050">
-                <a:solidFill>
-                  <a:srgbClr val="A6ADB6"/>
-                </a:solidFill>
-                <a:latin typeface="GQ Text"/>
-                <a:cs typeface="GQ Text"/>
-                <a:ea typeface="GQ Text"/>
-              </a:rPr>
-              <a:t>және нәтижелерді кесте</a:t>
-            </a:r>
-          </a:p>
-          <a:p>
-            <a:pPr algn="l">
-              <a:lnSpc>
-                <a:spcPts val="1500"/>
-              </a:lnSpc>
-            </a:pPr>
-            <a:r>
-              <a:rPr sz="1050">
-                <a:solidFill>
-                  <a:srgbClr val="A6ADB6"/>
-                </a:solidFill>
-                <a:latin typeface="GQ Text"/>
-                <a:cs typeface="GQ Text"/>
-                <a:ea typeface="GQ Text"/>
-              </a:rPr>
-              <a:t>түрінде жүктеу</a:t>
-            </a:r>
-          </a:p>
-        </p:txBody>
-      </p:sp>
-      <p:sp>
-        <p:nvSpPr>
-          <p:cNvPr id="19" name="Rectangle 18"/>
-          <p:cNvSpPr/>
-          <p:nvPr/>
-        </p:nvSpPr>
-        <p:spPr>
-          <a:xfrm>
-            <a:off x="749808" y="4103052"/>
-            <a:ext cx="10692079" cy="940435"/>
-          </a:xfrm>
-          <a:prstGeom prst="rect">
-            <a:avLst/>
-          </a:prstGeom>
-          <a:solidFill>
-            <a:srgbClr val="0064B9"/>
-          </a:solidFill>
-          <a:ln>
-            <a:noFill/>
-          </a:ln>
-          <a:effectLst/>
-        </p:spPr>
-        <p:txBody>
-          <a:bodyPr rtlCol="0" anchor="ctr" wrap="none"/>
-          <a:lstStyle/>
-          <a:p>
-            <a:pPr algn="ctr"/>
-          </a:p>
-        </p:txBody>
-      </p:sp>
-      <p:sp>
-        <p:nvSpPr>
-          <p:cNvPr id="20" name="TextBox 19"/>
+                <a:latin typeface="IBM Plex Mono Medium"/>
+                <a:cs typeface="IBM Plex Mono Medium"/>
+                <a:ea typeface="IBM Plex Mono Medium"/>
+              </a:rPr>
+              <a:t>МҰҒАЛІМНІҢ ТАПСЫРМАСЫ</a:t>
+            </a:r>
+          </a:p>
+        </p:txBody>
+      </p:sp>
+      <p:sp>
+        <p:nvSpPr>
+          <p:cNvPr id="23" name="TextBox 22"/>
           <p:cNvSpPr txBox="1"/>
           <p:nvPr/>
         </p:nvSpPr>
         <p:spPr>
           <a:xfrm>
-            <a:off x="1024127" y="4302137"/>
-            <a:ext cx="10143439" cy="575468"/>
+            <a:off x="3407347" y="5105829"/>
+            <a:ext cx="2383219" cy="600892"/>
           </a:xfrm>
           <a:prstGeom prst="rect">
             <a:avLst/>
@@ -12322,51 +12387,33 @@
           <a:p>
             <a:pPr algn="l">
               <a:lnSpc>
-                <a:spcPts val="1812"/>
-              </a:lnSpc>
-            </a:pPr>
-            <a:r>
-              <a:rPr sz="1250">
-                <a:solidFill>
-                  <a:srgbClr val="FFFFFF"/>
-                </a:solidFill>
-                <a:latin typeface="GQ Text SemiBold"/>
-                <a:cs typeface="GQ Text SemiBold"/>
-                <a:ea typeface="GQ Text SemiBold"/>
-              </a:rPr>
-              <a:t>Қазақ дауыстарымен 623 жазба, тірі кейіпкерлер, ірі түймелер, әр қатені талдау және кез келген жерден негізгі экранға</a:t>
-            </a:r>
-          </a:p>
-          <a:p>
-            <a:pPr algn="l">
-              <a:lnSpc>
-                <a:spcPts val="1812"/>
-              </a:lnSpc>
-            </a:pPr>
-            <a:r>
-              <a:rPr sz="1250">
-                <a:solidFill>
-                  <a:srgbClr val="FFFFFF"/>
-                </a:solidFill>
-                <a:latin typeface="GQ Text SemiBold"/>
-                <a:cs typeface="GQ Text SemiBold"/>
-                <a:ea typeface="GQ Text SemiBold"/>
-              </a:rPr>
-              <a:t>оралу.</a:t>
-            </a:r>
-          </a:p>
-        </p:txBody>
-      </p:sp>
-      <p:sp>
-        <p:nvSpPr>
-          <p:cNvPr id="21" name="TextBox 20"/>
+                <a:spcPts val="3332"/>
+              </a:lnSpc>
+            </a:pPr>
+            <a:r>
+              <a:rPr sz="3400" spc="-102">
+                <a:solidFill>
+                  <a:srgbClr val="EEEBE5"/>
+                </a:solidFill>
+                <a:latin typeface="GQ Text Bold"/>
+                <a:cs typeface="GQ Text Bold"/>
+                <a:ea typeface="GQ Text Bold"/>
+              </a:rPr>
+              <a:t>10</a:t>
+            </a:r>
+          </a:p>
+        </p:txBody>
+      </p:sp>
+      <p:sp>
+        <p:nvSpPr>
+          <p:cNvPr id="24" name="TextBox 23"/>
           <p:cNvSpPr txBox="1"/>
           <p:nvPr/>
         </p:nvSpPr>
         <p:spPr>
           <a:xfrm>
-            <a:off x="749808" y="5506133"/>
-            <a:ext cx="2383219" cy="600892"/>
+            <a:off x="3407347" y="5663755"/>
+            <a:ext cx="2383219" cy="216408"/>
           </a:xfrm>
           <a:prstGeom prst="rect">
             <a:avLst/>
@@ -12381,6 +12428,47 @@
           <a:p>
             <a:pPr algn="l">
               <a:lnSpc>
+                <a:spcPts val="1200"/>
+              </a:lnSpc>
+            </a:pPr>
+            <a:r>
+              <a:rPr sz="800" spc="64">
+                <a:solidFill>
+                  <a:srgbClr val="A6ADB6"/>
+                </a:solidFill>
+                <a:latin typeface="IBM Plex Mono Medium"/>
+                <a:cs typeface="IBM Plex Mono Medium"/>
+                <a:ea typeface="IBM Plex Mono Medium"/>
+              </a:rPr>
+              <a:t>ОНЫҢ ҮЛГІСІМЕН</a:t>
+            </a:r>
+          </a:p>
+        </p:txBody>
+      </p:sp>
+      <p:sp>
+        <p:nvSpPr>
+          <p:cNvPr id="25" name="TextBox 24"/>
+          <p:cNvSpPr txBox="1"/>
+          <p:nvPr/>
+        </p:nvSpPr>
+        <p:spPr>
+          <a:xfrm>
+            <a:off x="6064886" y="5105829"/>
+            <a:ext cx="2383219" cy="600892"/>
+          </a:xfrm>
+          <a:prstGeom prst="rect">
+            <a:avLst/>
+          </a:prstGeom>
+          <a:noFill/>
+        </p:spPr>
+        <p:txBody>
+          <a:bodyPr wrap="none" lIns="0" rIns="0" tIns="0" bIns="0" anchor="t">
+            <a:spAutoFit/>
+          </a:bodyPr>
+          <a:lstStyle/>
+          <a:p>
+            <a:pPr algn="l">
+              <a:lnSpc>
                 <a:spcPts val="3332"/>
               </a:lnSpc>
             </a:pPr>
@@ -12393,20 +12481,20 @@
                 <a:cs typeface="GQ Text Bold"/>
                 <a:ea typeface="GQ Text Bold"/>
               </a:rPr>
-              <a:t>12</a:t>
-            </a:r>
-          </a:p>
-        </p:txBody>
-      </p:sp>
-      <p:sp>
-        <p:nvSpPr>
-          <p:cNvPr id="22" name="TextBox 21"/>
+              <a:t>9</a:t>
+            </a:r>
+          </a:p>
+        </p:txBody>
+      </p:sp>
+      <p:sp>
+        <p:nvSpPr>
+          <p:cNvPr id="26" name="TextBox 25"/>
           <p:cNvSpPr txBox="1"/>
           <p:nvPr/>
         </p:nvSpPr>
         <p:spPr>
           <a:xfrm>
-            <a:off x="749808" y="6064059"/>
+            <a:off x="6064886" y="5663755"/>
             <a:ext cx="2383219" cy="216408"/>
           </a:xfrm>
           <a:prstGeom prst="rect">
@@ -12434,171 +12522,7 @@
                 <a:cs typeface="IBM Plex Mono Medium"/>
                 <a:ea typeface="IBM Plex Mono Medium"/>
               </a:rPr>
-              <a:t>САБАҚ · 5–7 СЫНЫП</a:t>
-            </a:r>
-          </a:p>
-        </p:txBody>
-      </p:sp>
-      <p:sp>
-        <p:nvSpPr>
-          <p:cNvPr id="23" name="TextBox 22"/>
-          <p:cNvSpPr txBox="1"/>
-          <p:nvPr/>
-        </p:nvSpPr>
-        <p:spPr>
-          <a:xfrm>
-            <a:off x="3407347" y="5506133"/>
-            <a:ext cx="2383219" cy="600892"/>
-          </a:xfrm>
-          <a:prstGeom prst="rect">
-            <a:avLst/>
-          </a:prstGeom>
-          <a:noFill/>
-        </p:spPr>
-        <p:txBody>
-          <a:bodyPr wrap="none" lIns="0" rIns="0" tIns="0" bIns="0" anchor="t">
-            <a:spAutoFit/>
-          </a:bodyPr>
-          <a:lstStyle/>
-          <a:p>
-            <a:pPr algn="l">
-              <a:lnSpc>
-                <a:spcPts val="3332"/>
-              </a:lnSpc>
-            </a:pPr>
-            <a:r>
-              <a:rPr sz="3400" spc="-102">
-                <a:solidFill>
-                  <a:srgbClr val="EEEBE5"/>
-                </a:solidFill>
-                <a:latin typeface="GQ Text Bold"/>
-                <a:cs typeface="GQ Text Bold"/>
-                <a:ea typeface="GQ Text Bold"/>
-              </a:rPr>
-              <a:t>7</a:t>
-            </a:r>
-          </a:p>
-        </p:txBody>
-      </p:sp>
-      <p:sp>
-        <p:nvSpPr>
-          <p:cNvPr id="24" name="TextBox 23"/>
-          <p:cNvSpPr txBox="1"/>
-          <p:nvPr/>
-        </p:nvSpPr>
-        <p:spPr>
-          <a:xfrm>
-            <a:off x="3407347" y="6064059"/>
-            <a:ext cx="2383219" cy="216408"/>
-          </a:xfrm>
-          <a:prstGeom prst="rect">
-            <a:avLst/>
-          </a:prstGeom>
-          <a:noFill/>
-        </p:spPr>
-        <p:txBody>
-          <a:bodyPr wrap="none" lIns="0" rIns="0" tIns="0" bIns="0" anchor="t">
-            <a:spAutoFit/>
-          </a:bodyPr>
-          <a:lstStyle/>
-          <a:p>
-            <a:pPr algn="l">
-              <a:lnSpc>
-                <a:spcPts val="1200"/>
-              </a:lnSpc>
-            </a:pPr>
-            <a:r>
-              <a:rPr sz="800" spc="64">
-                <a:solidFill>
-                  <a:srgbClr val="A6ADB6"/>
-                </a:solidFill>
-                <a:latin typeface="IBM Plex Mono Medium"/>
-                <a:cs typeface="IBM Plex Mono Medium"/>
-                <a:ea typeface="IBM Plex Mono Medium"/>
-              </a:rPr>
-              <a:t>САБАҚ · 7–9 СЫНЫП</a:t>
-            </a:r>
-          </a:p>
-        </p:txBody>
-      </p:sp>
-      <p:sp>
-        <p:nvSpPr>
-          <p:cNvPr id="25" name="TextBox 24"/>
-          <p:cNvSpPr txBox="1"/>
-          <p:nvPr/>
-        </p:nvSpPr>
-        <p:spPr>
-          <a:xfrm>
-            <a:off x="6064886" y="5506133"/>
-            <a:ext cx="2383219" cy="600892"/>
-          </a:xfrm>
-          <a:prstGeom prst="rect">
-            <a:avLst/>
-          </a:prstGeom>
-          <a:noFill/>
-        </p:spPr>
-        <p:txBody>
-          <a:bodyPr wrap="none" lIns="0" rIns="0" tIns="0" bIns="0" anchor="t">
-            <a:spAutoFit/>
-          </a:bodyPr>
-          <a:lstStyle/>
-          <a:p>
-            <a:pPr algn="l">
-              <a:lnSpc>
-                <a:spcPts val="3332"/>
-              </a:lnSpc>
-            </a:pPr>
-            <a:r>
-              <a:rPr sz="3400" spc="-102">
-                <a:solidFill>
-                  <a:srgbClr val="EEEBE5"/>
-                </a:solidFill>
-                <a:latin typeface="GQ Text Bold"/>
-                <a:cs typeface="GQ Text Bold"/>
-                <a:ea typeface="GQ Text Bold"/>
-              </a:rPr>
-              <a:t>7</a:t>
-            </a:r>
-          </a:p>
-        </p:txBody>
-      </p:sp>
-      <p:sp>
-        <p:nvSpPr>
-          <p:cNvPr id="26" name="TextBox 25"/>
-          <p:cNvSpPr txBox="1"/>
-          <p:nvPr/>
-        </p:nvSpPr>
-        <p:spPr>
-          <a:xfrm>
-            <a:off x="6064886" y="6064059"/>
-            <a:ext cx="2383219" cy="216408"/>
-          </a:xfrm>
-          <a:prstGeom prst="rect">
-            <a:avLst/>
-          </a:prstGeom>
-          <a:noFill/>
-        </p:spPr>
-        <p:txBody>
-          <a:bodyPr wrap="none" lIns="0" rIns="0" tIns="0" bIns="0" anchor="t">
-            <a:spAutoFit/>
-          </a:bodyPr>
-          <a:lstStyle/>
-          <a:p>
-            <a:pPr algn="l">
-              <a:lnSpc>
-                <a:spcPts val="1200"/>
-              </a:lnSpc>
-            </a:pPr>
-            <a:r>
-              <a:rPr sz="800" spc="64">
-                <a:solidFill>
-                  <a:srgbClr val="A6ADB6"/>
-                </a:solidFill>
-                <a:latin typeface="IBM Plex Mono Medium"/>
-                <a:cs typeface="IBM Plex Mono Medium"/>
-                <a:ea typeface="IBM Plex Mono Medium"/>
-              </a:rPr>
-              <a:t>САБАҚ · 9–11 СЫНЫП</a:t>
+              <a:t>ДЕРЕККӨЗІ БАР ТҮЗЕТУ</a:t>
             </a:r>
           </a:p>
         </p:txBody>
@@ -12722,7 +12646,7 @@
         <p:spPr>
           <a:xfrm>
             <a:off x="749808" y="2259330"/>
-            <a:ext cx="6153226" cy="2536952"/>
+            <a:ext cx="6153226" cy="2741421"/>
           </a:xfrm>
           <a:prstGeom prst="rect">
             <a:avLst/>
@@ -12754,7 +12678,7 @@
         <p:spPr>
           <a:xfrm>
             <a:off x="749808" y="2259330"/>
-            <a:ext cx="32004" cy="2536952"/>
+            <a:ext cx="32004" cy="2741421"/>
           </a:xfrm>
           <a:prstGeom prst="rect">
             <a:avLst/>
@@ -13209,7 +13133,7 @@
                 <a:cs typeface="GQ Text"/>
                 <a:ea typeface="GQ Text"/>
               </a:rPr>
-              <a:t> Кодты және өзгерістер тарихын сақтайды, Android нұсқасы да</a:t>
+              <a:t> Кодты және өзгерістер тарихын сақтайды, Android және</a:t>
             </a:r>
           </a:p>
           <a:p>
@@ -13227,7 +13151,7 @@
                 <a:cs typeface="GQ Text"/>
                 <a:ea typeface="GQ Text"/>
               </a:rPr>
-              <a:t>сонда жиналады.</a:t>
+              <a:t>Windows нұсқалары да сонда жиналады.</a:t>
             </a:r>
           </a:p>
         </p:txBody>
@@ -13375,7 +13299,7 @@
         <p:spPr>
           <a:xfrm>
             <a:off x="1241044" y="4284776"/>
-            <a:ext cx="5387670" cy="306705"/>
+            <a:ext cx="5387670" cy="511174"/>
           </a:xfrm>
           <a:prstGeom prst="rect">
             <a:avLst/>
@@ -13402,7 +13326,7 @@
                 <a:cs typeface="GQ Text SemiBold"/>
                 <a:ea typeface="GQ Text SemiBold"/>
               </a:rPr>
-              <a:t>Capacitor. </a:t>
+              <a:t>Capacitor және Electron. </a:t>
             </a:r>
             <a:r>
               <a:rPr sz="1150">
@@ -13413,7 +13337,25 @@
                 <a:cs typeface="GQ Text"/>
                 <a:ea typeface="GQ Text"/>
               </a:rPr>
-              <a:t> Сайтты телефонға орнатылатын қосымшаға айналдырады.</a:t>
+              <a:t> Сайтты телефонға және Windows-қа арналған</a:t>
+            </a:r>
+          </a:p>
+          <a:p>
+            <a:pPr algn="l">
+              <a:lnSpc>
+                <a:spcPts val="1610"/>
+              </a:lnSpc>
+            </a:pPr>
+            <a:r>
+              <a:rPr sz="1150">
+                <a:solidFill>
+                  <a:srgbClr val="EEEBE5"/>
+                </a:solidFill>
+                <a:latin typeface="GQ Text"/>
+                <a:cs typeface="GQ Text"/>
+                <a:ea typeface="GQ Text"/>
+              </a:rPr>
+              <a:t>қосымшаға айналдырады.</a:t>
             </a:r>
           </a:p>
         </p:txBody>
@@ -13536,7 +13478,7 @@
                 <a:cs typeface="GQ Text"/>
                 <a:ea typeface="GQ Text"/>
               </a:rPr>
-              <a:t>Әр өзгерісте 70 автотест</a:t>
+              <a:t>Әр өзгерісте 7 автотест</a:t>
             </a:r>
           </a:p>
         </p:txBody>
@@ -13700,7 +13642,7 @@
                 <a:cs typeface="GQ Text"/>
                 <a:ea typeface="GQ Text"/>
               </a:rPr>
-              <a:t>Тапсырма тұжырымдарын тексеру</a:t>
+              <a:t>Мұғалімнің мәтінін оның құжатымен салыстыру</a:t>
             </a:r>
           </a:p>
         </p:txBody>
@@ -13795,7 +13737,7 @@
         </p:nvSpPr>
         <p:spPr>
           <a:xfrm>
-            <a:off x="749808" y="4942586"/>
+            <a:off x="749808" y="5147056"/>
             <a:ext cx="10692079" cy="710247"/>
           </a:xfrm>
           <a:prstGeom prst="rect">
@@ -13825,7 +13767,7 @@
         </p:nvSpPr>
         <p:spPr>
           <a:xfrm>
-            <a:off x="1024127" y="5141671"/>
+            <a:off x="1024127" y="5346141"/>
             <a:ext cx="10143439" cy="345281"/>
           </a:xfrm>
           <a:prstGeom prst="rect">
@@ -14054,7 +13996,7 @@
                 <a:cs typeface="GQ Text Bold"/>
                 <a:ea typeface="GQ Text Bold"/>
               </a:rPr>
-              <a:t>Кәдімгі жаттықтырғышта жоқ төрт нәрсе</a:t>
+              <a:t>Қосымшаны тірі ететін төрт нәрсе</a:t>
             </a:r>
           </a:p>
         </p:txBody>
@@ -14095,7 +14037,7 @@
                 <a:cs typeface="GQ Text"/>
                 <a:ea typeface="GQ Text"/>
               </a:rPr>
-              <a:t>Әрқайсысы әдемілік үшін емес, онсыз оқушы шұғылдануды тоқтатқандықтан пайда болды.</a:t>
+              <a:t>Әрқайсысы әдемілік үшін емес: солай оқушы тақырыпты жарты жолда тастамайды.</a:t>
             </a:r>
           </a:p>
         </p:txBody>
@@ -14109,7 +14051,7 @@
         <p:spPr>
           <a:xfrm>
             <a:off x="749808" y="2323084"/>
-            <a:ext cx="2522143" cy="2343658"/>
+            <a:ext cx="2522143" cy="2165858"/>
           </a:xfrm>
           <a:prstGeom prst="rect">
             <a:avLst/>
@@ -14141,7 +14083,7 @@
         <p:spPr>
           <a:xfrm>
             <a:off x="749808" y="2323084"/>
-            <a:ext cx="32004" cy="2343658"/>
+            <a:ext cx="32004" cy="2165858"/>
           </a:xfrm>
           <a:prstGeom prst="rect">
             <a:avLst/>
@@ -14212,7 +14154,7 @@
         <p:spPr>
           <a:xfrm>
             <a:off x="1005840" y="2796590"/>
-            <a:ext cx="2010079" cy="525551"/>
+            <a:ext cx="2010079" cy="308381"/>
           </a:xfrm>
           <a:prstGeom prst="rect">
             <a:avLst/>
@@ -14239,25 +14181,7 @@
                 <a:cs typeface="GQ Text Bold"/>
                 <a:ea typeface="GQ Text Bold"/>
               </a:rPr>
-              <a:t>Орыс әріптерін</a:t>
-            </a:r>
-          </a:p>
-          <a:p>
-            <a:pPr algn="l">
-              <a:lnSpc>
-                <a:spcPts val="1710"/>
-              </a:lnSpc>
-            </a:pPr>
-            <a:r>
-              <a:rPr sz="1500" spc="-22">
-                <a:solidFill>
-                  <a:srgbClr val="EEEBE5"/>
-                </a:solidFill>
-                <a:latin typeface="GQ Text Bold"/>
-                <a:cs typeface="GQ Text Bold"/>
-                <a:ea typeface="GQ Text Bold"/>
-              </a:rPr>
-              <a:t>қабылдайды</a:t>
+              <a:t>Мұғалімнің тәртібі</a:t>
             </a:r>
           </a:p>
         </p:txBody>
@@ -14270,7 +14194,7 @@
         </p:nvSpPr>
         <p:spPr>
           <a:xfrm>
-            <a:off x="1005840" y="3392678"/>
+            <a:off x="1005840" y="3175508"/>
             <a:ext cx="204216" cy="252475"/>
           </a:xfrm>
           <a:prstGeom prst="rect">
@@ -14311,7 +14235,7 @@
         </p:nvSpPr>
         <p:spPr>
           <a:xfrm>
-            <a:off x="1210056" y="3392678"/>
+            <a:off x="1210056" y="3175508"/>
             <a:ext cx="1805863" cy="608076"/>
           </a:xfrm>
           <a:prstGeom prst="rect">
@@ -14339,7 +14263,7 @@
                 <a:cs typeface="GQ Text"/>
                 <a:ea typeface="GQ Text"/>
               </a:rPr>
-              <a:t>Қазақ тілінде орыс</a:t>
+              <a:t>Диалог → ереже →</a:t>
             </a:r>
           </a:p>
           <a:p>
@@ -14357,7 +14281,7 @@
                 <a:cs typeface="GQ Text"/>
                 <a:ea typeface="GQ Text"/>
               </a:rPr>
-              <a:t>пернетақтасында жоқ тоғыз</a:t>
+              <a:t>тапсырма, бірінші</a:t>
             </a:r>
           </a:p>
           <a:p>
@@ -14375,7 +14299,7 @@
                 <a:cs typeface="GQ Text"/>
                 <a:ea typeface="GQ Text"/>
               </a:rPr>
-              <a:t>әріп бар</a:t>
+              <a:t>нұсқадағыдай</a:t>
             </a:r>
           </a:p>
         </p:txBody>
@@ -14388,7 +14312,7 @@
         </p:nvSpPr>
         <p:spPr>
           <a:xfrm>
-            <a:off x="1005840" y="4026662"/>
+            <a:off x="1005840" y="3809492"/>
             <a:ext cx="204216" cy="252475"/>
           </a:xfrm>
           <a:prstGeom prst="rect">
@@ -14429,7 +14353,7 @@
         </p:nvSpPr>
         <p:spPr>
           <a:xfrm>
-            <a:off x="1210056" y="4026662"/>
+            <a:off x="1210056" y="3809492"/>
             <a:ext cx="1805863" cy="430276"/>
           </a:xfrm>
           <a:prstGeom prst="rect">
@@ -14457,7 +14381,7 @@
                 <a:cs typeface="GQ Text"/>
                 <a:ea typeface="GQ Text"/>
               </a:rPr>
-              <a:t>Жауап есептеледі, дұрыс</a:t>
+              <a:t>Тақырыптар — мұғалімнің</a:t>
             </a:r>
           </a:p>
           <a:p>
@@ -14475,7 +14399,7 @@
                 <a:cs typeface="GQ Text"/>
                 <a:ea typeface="GQ Text"/>
               </a:rPr>
-              <a:t>жазылуы көрсетіледі</a:t>
+              <a:t>парақшасынан</a:t>
             </a:r>
           </a:p>
         </p:txBody>
@@ -14489,7 +14413,7 @@
         <p:spPr>
           <a:xfrm>
             <a:off x="3473119" y="2323084"/>
-            <a:ext cx="2522143" cy="2343658"/>
+            <a:ext cx="2522143" cy="2165858"/>
           </a:xfrm>
           <a:prstGeom prst="rect">
             <a:avLst/>
@@ -14521,7 +14445,7 @@
         <p:spPr>
           <a:xfrm>
             <a:off x="3473119" y="2323084"/>
-            <a:ext cx="32004" cy="2343658"/>
+            <a:ext cx="32004" cy="2165858"/>
           </a:xfrm>
           <a:prstGeom prst="rect">
             <a:avLst/>
@@ -14619,7 +14543,7 @@
                 <a:cs typeface="GQ Text Bold"/>
                 <a:ea typeface="GQ Text Bold"/>
               </a:rPr>
-              <a:t>Жалғауларды</a:t>
+              <a:t>Сөйлейтін</a:t>
             </a:r>
           </a:p>
           <a:p>
@@ -14637,7 +14561,7 @@
                 <a:cs typeface="GQ Text Bold"/>
                 <a:ea typeface="GQ Text Bold"/>
               </a:rPr>
-              <a:t>ережемен есептейді</a:t>
+              <a:t>кейіпкерлер</a:t>
             </a:r>
           </a:p>
         </p:txBody>
@@ -14719,7 +14643,7 @@
                 <a:cs typeface="GQ Text"/>
                 <a:ea typeface="GQ Text"/>
               </a:rPr>
-              <a:t>Кез келген өз сөзіңді қой —</a:t>
+              <a:t>Айша мен мұғалім әр</a:t>
             </a:r>
           </a:p>
           <a:p>
@@ -14737,7 +14661,7 @@
                 <a:cs typeface="GQ Text"/>
                 <a:ea typeface="GQ Text"/>
               </a:rPr>
-              <a:t>барлық формасын көресің</a:t>
+              <a:t>репликаны айтады</a:t>
             </a:r>
           </a:p>
         </p:txBody>
@@ -14819,7 +14743,7 @@
                 <a:cs typeface="GQ Text"/>
                 <a:ea typeface="GQ Text"/>
               </a:rPr>
-              <a:t>Кесте емес, қазақ тілінің</a:t>
+              <a:t>Дауысы естіліп тұрғанда</a:t>
             </a:r>
           </a:p>
           <a:p>
@@ -14837,7 +14761,7 @@
                 <a:cs typeface="GQ Text"/>
                 <a:ea typeface="GQ Text"/>
               </a:rPr>
-              <a:t>ережелері</a:t>
+              <a:t>кейіпкер қозғалады</a:t>
             </a:r>
           </a:p>
         </p:txBody>
@@ -14851,7 +14775,7 @@
         <p:spPr>
           <a:xfrm>
             <a:off x="6196431" y="2323084"/>
-            <a:ext cx="2522143" cy="2343658"/>
+            <a:ext cx="2522143" cy="2165858"/>
           </a:xfrm>
           <a:prstGeom prst="rect">
             <a:avLst/>
@@ -14883,7 +14807,7 @@
         <p:spPr>
           <a:xfrm>
             <a:off x="6196431" y="2323084"/>
-            <a:ext cx="32004" cy="2343658"/>
+            <a:ext cx="32004" cy="2165858"/>
           </a:xfrm>
           <a:prstGeom prst="rect">
             <a:avLst/>
@@ -14954,7 +14878,7 @@
         <p:spPr>
           <a:xfrm>
             <a:off x="6452463" y="2796590"/>
-            <a:ext cx="2010079" cy="525551"/>
+            <a:ext cx="2010079" cy="308381"/>
           </a:xfrm>
           <a:prstGeom prst="rect">
             <a:avLst/>
@@ -14981,25 +14905,7 @@
                 <a:cs typeface="GQ Text Bold"/>
                 <a:ea typeface="GQ Text Bold"/>
               </a:rPr>
-              <a:t>Ұмытылғанды</a:t>
-            </a:r>
-          </a:p>
-          <a:p>
-            <a:pPr algn="l">
-              <a:lnSpc>
-                <a:spcPts val="1710"/>
-              </a:lnSpc>
-            </a:pPr>
-            <a:r>
-              <a:rPr sz="1500" spc="-22">
-                <a:solidFill>
-                  <a:srgbClr val="EEEBE5"/>
-                </a:solidFill>
-                <a:latin typeface="GQ Text Bold"/>
-                <a:cs typeface="GQ Text Bold"/>
-                <a:ea typeface="GQ Text Bold"/>
-              </a:rPr>
-              <a:t>қайтарады</a:t>
+              <a:t>Жеңілдіксіз тексеру</a:t>
             </a:r>
           </a:p>
         </p:txBody>
@@ -15012,7 +14918,7 @@
         </p:nvSpPr>
         <p:spPr>
           <a:xfrm>
-            <a:off x="6452463" y="3392678"/>
+            <a:off x="6452463" y="3175508"/>
             <a:ext cx="204216" cy="252475"/>
           </a:xfrm>
           <a:prstGeom prst="rect">
@@ -15053,8 +14959,8 @@
         </p:nvSpPr>
         <p:spPr>
           <a:xfrm>
-            <a:off x="6656679" y="3392678"/>
-            <a:ext cx="1805863" cy="430276"/>
+            <a:off x="6656679" y="3175508"/>
+            <a:ext cx="1805863" cy="252475"/>
           </a:xfrm>
           <a:prstGeom prst="rect">
             <a:avLst/>
@@ -15081,9 +14987,73 @@
                 <a:cs typeface="GQ Text"/>
                 <a:ea typeface="GQ Text"/>
               </a:rPr>
-              <a:t>Қателессең — тапсырма</a:t>
-            </a:r>
-          </a:p>
+              <a:t>Жауап бірден тексеріледі</a:t>
+            </a:r>
+          </a:p>
+        </p:txBody>
+      </p:sp>
+      <p:sp>
+        <p:nvSpPr>
+          <p:cNvPr id="30" name="TextBox 29"/>
+          <p:cNvSpPr txBox="1"/>
+          <p:nvPr/>
+        </p:nvSpPr>
+        <p:spPr>
+          <a:xfrm>
+            <a:off x="6452463" y="3453892"/>
+            <a:ext cx="204216" cy="252475"/>
+          </a:xfrm>
+          <a:prstGeom prst="rect">
+            <a:avLst/>
+          </a:prstGeom>
+          <a:noFill/>
+        </p:spPr>
+        <p:txBody>
+          <a:bodyPr wrap="none" lIns="0" rIns="0" tIns="0" bIns="0" anchor="t">
+            <a:spAutoFit/>
+          </a:bodyPr>
+          <a:lstStyle/>
+          <a:p>
+            <a:pPr algn="l">
+              <a:lnSpc>
+                <a:spcPts val="1400"/>
+              </a:lnSpc>
+            </a:pPr>
+            <a:r>
+              <a:rPr sz="1000">
+                <a:solidFill>
+                  <a:srgbClr val="59AAF8"/>
+                </a:solidFill>
+                <a:latin typeface="IBM Plex Mono Medium"/>
+                <a:cs typeface="IBM Plex Mono Medium"/>
+                <a:ea typeface="IBM Plex Mono Medium"/>
+              </a:rPr>
+              <a:t>—</a:t>
+            </a:r>
+          </a:p>
+        </p:txBody>
+      </p:sp>
+      <p:sp>
+        <p:nvSpPr>
+          <p:cNvPr id="31" name="TextBox 30"/>
+          <p:cNvSpPr txBox="1"/>
+          <p:nvPr/>
+        </p:nvSpPr>
+        <p:spPr>
+          <a:xfrm>
+            <a:off x="6656679" y="3453892"/>
+            <a:ext cx="1805863" cy="430276"/>
+          </a:xfrm>
+          <a:prstGeom prst="rect">
+            <a:avLst/>
+          </a:prstGeom>
+          <a:noFill/>
+        </p:spPr>
+        <p:txBody>
+          <a:bodyPr wrap="none" lIns="0" rIns="0" tIns="0" bIns="0" anchor="t">
+            <a:spAutoFit/>
+          </a:bodyPr>
+          <a:lstStyle/>
           <a:p>
             <a:pPr algn="l">
               <a:lnSpc>
@@ -15099,73 +15069,9 @@
                 <a:cs typeface="GQ Text"/>
                 <a:ea typeface="GQ Text"/>
               </a:rPr>
-              <a:t>бүгін қайтады</a:t>
-            </a:r>
-          </a:p>
-        </p:txBody>
-      </p:sp>
-      <p:sp>
-        <p:nvSpPr>
-          <p:cNvPr id="30" name="TextBox 29"/>
-          <p:cNvSpPr txBox="1"/>
-          <p:nvPr/>
-        </p:nvSpPr>
-        <p:spPr>
-          <a:xfrm>
-            <a:off x="6452463" y="3848862"/>
-            <a:ext cx="204216" cy="252475"/>
-          </a:xfrm>
-          <a:prstGeom prst="rect">
-            <a:avLst/>
-          </a:prstGeom>
-          <a:noFill/>
-        </p:spPr>
-        <p:txBody>
-          <a:bodyPr wrap="none" lIns="0" rIns="0" tIns="0" bIns="0" anchor="t">
-            <a:spAutoFit/>
-          </a:bodyPr>
-          <a:lstStyle/>
-          <a:p>
-            <a:pPr algn="l">
-              <a:lnSpc>
-                <a:spcPts val="1400"/>
-              </a:lnSpc>
-            </a:pPr>
-            <a:r>
-              <a:rPr sz="1000">
-                <a:solidFill>
-                  <a:srgbClr val="59AAF8"/>
-                </a:solidFill>
-                <a:latin typeface="IBM Plex Mono Medium"/>
-                <a:cs typeface="IBM Plex Mono Medium"/>
-                <a:ea typeface="IBM Plex Mono Medium"/>
-              </a:rPr>
-              <a:t>—</a:t>
-            </a:r>
-          </a:p>
-        </p:txBody>
-      </p:sp>
-      <p:sp>
-        <p:nvSpPr>
-          <p:cNvPr id="31" name="TextBox 30"/>
-          <p:cNvSpPr txBox="1"/>
-          <p:nvPr/>
-        </p:nvSpPr>
-        <p:spPr>
-          <a:xfrm>
-            <a:off x="6656679" y="3848862"/>
-            <a:ext cx="1805863" cy="608076"/>
-          </a:xfrm>
-          <a:prstGeom prst="rect">
-            <a:avLst/>
-          </a:prstGeom>
-          <a:noFill/>
-        </p:spPr>
-        <p:txBody>
-          <a:bodyPr wrap="none" lIns="0" rIns="0" tIns="0" bIns="0" anchor="t">
-            <a:spAutoFit/>
-          </a:bodyPr>
-          <a:lstStyle/>
+              <a:t>«Бәрін белгілей салу»</a:t>
+            </a:r>
+          </a:p>
           <a:p>
             <a:pPr algn="l">
               <a:lnSpc>
@@ -15181,43 +15087,7 @@
                 <a:cs typeface="GQ Text"/>
                 <a:ea typeface="GQ Text"/>
               </a:rPr>
-              <a:t>Дұрыс жауап берсең — бір</a:t>
-            </a:r>
-          </a:p>
-          <a:p>
-            <a:pPr algn="l">
-              <a:lnSpc>
-                <a:spcPts val="1400"/>
-              </a:lnSpc>
-            </a:pPr>
-            <a:r>
-              <a:rPr sz="1000">
-                <a:solidFill>
-                  <a:srgbClr val="EEEBE5"/>
-                </a:solidFill>
-                <a:latin typeface="GQ Text"/>
-                <a:cs typeface="GQ Text"/>
-                <a:ea typeface="GQ Text"/>
-              </a:rPr>
-              <a:t>күннен, содан соң үш</a:t>
-            </a:r>
-          </a:p>
-          <a:p>
-            <a:pPr algn="l">
-              <a:lnSpc>
-                <a:spcPts val="1400"/>
-              </a:lnSpc>
-            </a:pPr>
-            <a:r>
-              <a:rPr sz="1000">
-                <a:solidFill>
-                  <a:srgbClr val="EEEBE5"/>
-                </a:solidFill>
-                <a:latin typeface="GQ Text"/>
-                <a:cs typeface="GQ Text"/>
-                <a:ea typeface="GQ Text"/>
-              </a:rPr>
-              <a:t>күннен кейін</a:t>
+              <a:t>есептелмейді</a:t>
             </a:r>
           </a:p>
         </p:txBody>
@@ -15231,7 +15101,7 @@
         <p:spPr>
           <a:xfrm>
             <a:off x="8919743" y="2323084"/>
-            <a:ext cx="2522143" cy="2343658"/>
+            <a:ext cx="2522143" cy="2165858"/>
           </a:xfrm>
           <a:prstGeom prst="rect">
             <a:avLst/>
@@ -15263,7 +15133,7 @@
         <p:spPr>
           <a:xfrm>
             <a:off x="8919743" y="2323084"/>
-            <a:ext cx="32004" cy="2343658"/>
+            <a:ext cx="32004" cy="2165858"/>
           </a:xfrm>
           <a:prstGeom prst="rect">
             <a:avLst/>
@@ -15334,7 +15204,7 @@
         <p:spPr>
           <a:xfrm>
             <a:off x="9175775" y="2796590"/>
-            <a:ext cx="2010079" cy="525551"/>
+            <a:ext cx="2010079" cy="308381"/>
           </a:xfrm>
           <a:prstGeom prst="rect">
             <a:avLst/>
@@ -15361,25 +15231,7 @@
                 <a:cs typeface="GQ Text Bold"/>
                 <a:ea typeface="GQ Text Bold"/>
               </a:rPr>
-              <a:t>Сөйлейді және</a:t>
-            </a:r>
-          </a:p>
-          <a:p>
-            <a:pPr algn="l">
-              <a:lnSpc>
-                <a:spcPts val="1710"/>
-              </a:lnSpc>
-            </a:pPr>
-            <a:r>
-              <a:rPr sz="1500" spc="-22">
-                <a:solidFill>
-                  <a:srgbClr val="EEEBE5"/>
-                </a:solidFill>
-                <a:latin typeface="GQ Text Bold"/>
-                <a:cs typeface="GQ Text Bold"/>
-                <a:ea typeface="GQ Text Bold"/>
-              </a:rPr>
-              <a:t>тыңдатады</a:t>
+              <a:t>Мәтін тексерілген</a:t>
             </a:r>
           </a:p>
         </p:txBody>
@@ -15392,7 +15244,7 @@
         </p:nvSpPr>
         <p:spPr>
           <a:xfrm>
-            <a:off x="9175775" y="3392678"/>
+            <a:off x="9175775" y="3175508"/>
             <a:ext cx="204216" cy="252475"/>
           </a:xfrm>
           <a:prstGeom prst="rect">
@@ -15433,7 +15285,7 @@
         </p:nvSpPr>
         <p:spPr>
           <a:xfrm>
-            <a:off x="9379991" y="3392678"/>
+            <a:off x="9379991" y="3175508"/>
             <a:ext cx="1805863" cy="430276"/>
           </a:xfrm>
           <a:prstGeom prst="rect">
@@ -15461,7 +15313,7 @@
                 <a:cs typeface="GQ Text"/>
                 <a:ea typeface="GQ Text"/>
               </a:rPr>
-              <a:t>Қазақ дауыстарымен 623</a:t>
+              <a:t>Ережелер «Бәйшешек»</a:t>
             </a:r>
           </a:p>
           <a:p>
@@ -15479,7 +15331,7 @@
                 <a:cs typeface="GQ Text"/>
                 <a:ea typeface="GQ Text"/>
               </a:rPr>
-              <a:t>жазба</a:t>
+              <a:t>оқулығымен салыстырылды</a:t>
             </a:r>
           </a:p>
         </p:txBody>
@@ -15492,7 +15344,7 @@
         </p:nvSpPr>
         <p:spPr>
           <a:xfrm>
-            <a:off x="9175775" y="3848862"/>
+            <a:off x="9175775" y="3631692"/>
             <a:ext cx="204216" cy="252475"/>
           </a:xfrm>
           <a:prstGeom prst="rect">
@@ -15533,8 +15385,8 @@
         </p:nvSpPr>
         <p:spPr>
           <a:xfrm>
-            <a:off x="9379991" y="3848862"/>
-            <a:ext cx="1805863" cy="430276"/>
+            <a:off x="9379991" y="3631692"/>
+            <a:ext cx="1805863" cy="252475"/>
           </a:xfrm>
           <a:prstGeom prst="rect">
             <a:avLst/>
@@ -15561,25 +15413,7 @@
                 <a:cs typeface="GQ Text"/>
                 <a:ea typeface="GQ Text"/>
               </a:rPr>
-              <a:t>Реплика естіліп тұрғанда</a:t>
-            </a:r>
-          </a:p>
-          <a:p>
-            <a:pPr algn="l">
-              <a:lnSpc>
-                <a:spcPts val="1400"/>
-              </a:lnSpc>
-            </a:pPr>
-            <a:r>
-              <a:rPr sz="1000">
-                <a:solidFill>
-                  <a:srgbClr val="EEEBE5"/>
-                </a:solidFill>
-                <a:latin typeface="GQ Text"/>
-                <a:cs typeface="GQ Text"/>
-                <a:ea typeface="GQ Text"/>
-              </a:rPr>
-              <a:t>кейіпкер қозғалады</a:t>
+              <a:t>Әр түзету — дереккөзімен</a:t>
             </a:r>
           </a:p>
         </p:txBody>
@@ -15592,7 +15426,7 @@
         </p:nvSpPr>
         <p:spPr>
           <a:xfrm>
-            <a:off x="749808" y="5069078"/>
+            <a:off x="749808" y="4891278"/>
             <a:ext cx="10692079" cy="710247"/>
           </a:xfrm>
           <a:prstGeom prst="rect">
@@ -15622,7 +15456,7 @@
         </p:nvSpPr>
         <p:spPr>
           <a:xfrm>
-            <a:off x="1024127" y="5268163"/>
+            <a:off x="1024127" y="5090363"/>
             <a:ext cx="10143439" cy="345281"/>
           </a:xfrm>
           <a:prstGeom prst="rect">
@@ -15650,7 +15484,7 @@
                 <a:cs typeface="GQ Text SemiBold"/>
                 <a:ea typeface="GQ Text SemiBold"/>
               </a:rPr>
-              <a:t>Және бұның бәрі интернетсіз жұмыс істейді: алғашқы жүктеуден кейін қосымша желіге бірде-бір сұрау жібермейді.</a:t>
+              <a:t>Және бұның бәрі интернетсіз жұмыс істейді: алғашқы жүктеуден кейін қосымша дыбыстаумен бірге құрылғыда сақталады.</a:t>
             </a:r>
           </a:p>
         </p:txBody>
@@ -16212,7 +16046,7 @@
                 <a:cs typeface="GQ Text Bold"/>
                 <a:ea typeface="GQ Text Bold"/>
               </a:rPr>
-              <a:t>210</a:t>
+              <a:t>97</a:t>
             </a:r>
           </a:p>
         </p:txBody>
@@ -16458,7 +16292,7 @@
                 <a:cs typeface="GQ Text"/>
                 <a:ea typeface="GQ Text"/>
               </a:rPr>
-              <a:t>Қосымша қаріпті және суреттерді қоса алғанда шамамен 1,4 МБ орын алады. Бір рет жүктеліп, әрі қарай интернетсіз жұмыс істейді — өлшеумен тексерілді.</a:t>
+              <a:t>Қосымша дыбыс жазбаларын, қаріпті және суреттерді қоса алғанда шамамен 1,5 МБ орын алады. Бір рет жүктеліп, әрі қарай интернетсіз жұмыс істейді — өлшеумен тексерілді.</a:t>
             </a:r>
           </a:p>
         </p:txBody>
@@ -16552,7 +16386,7 @@
         <p:spPr>
           <a:xfrm>
             <a:off x="749808" y="3472687"/>
-            <a:ext cx="6153226" cy="2122931"/>
+            <a:ext cx="6153226" cy="2440432"/>
           </a:xfrm>
           <a:prstGeom prst="rect">
             <a:avLst/>
@@ -16810,7 +16644,7 @@
                 <a:cs typeface="GQ Text SemiBold"/>
                 <a:ea typeface="GQ Text SemiBold"/>
               </a:rPr>
-              <a:t>Қазірдің өзінде: 26 сабақ және 623 дыбыс жазбасы · интернетсіз жұмыс істейді — телефонда да, компьютерде де · сайт барлығына</a:t>
+              <a:t>Қазірдің өзінде: мұғалімнің тапсырмасы бойынша 7 тақырып және 15 тапсырма · 47 дыбыс жазбасы · интернетсіз жұмыс істейді —</a:t>
             </a:r>
           </a:p>
           <a:p>
@@ -16828,7 +16662,7 @@
                 <a:cs typeface="GQ Text SemiBold"/>
                 <a:ea typeface="GQ Text SemiBold"/>
               </a:rPr>
-              <a:t>ашық</a:t>
+              <a:t>телефонда да, компьютерде де · сайт барлығына ашық</a:t>
             </a:r>
           </a:p>
         </p:txBody>
@@ -16883,7 +16717,7 @@
         <p:spPr>
           <a:xfrm>
             <a:off x="1024127" y="4000499"/>
-            <a:ext cx="5604586" cy="1403350"/>
+            <a:ext cx="5604586" cy="1720850"/>
           </a:xfrm>
           <a:prstGeom prst="rect">
             <a:avLst/>
@@ -16928,7 +16762,7 @@
                 <a:cs typeface="GQ Text Bold"/>
                 <a:ea typeface="GQ Text Bold"/>
               </a:rPr>
-              <a:t>және курсты бағдарламаға дейін жеткізетін</a:t>
+              <a:t>және мектеп бағдарламасы бойынша жаңа</a:t>
             </a:r>
           </a:p>
           <a:p>
@@ -16946,7 +16780,7 @@
                 <a:cs typeface="GQ Text Bold"/>
                 <a:ea typeface="GQ Text Bold"/>
               </a:rPr>
-              <a:t>әдіскер мұғалімдер керек. Әрі қарай</a:t>
+              <a:t>тақырыптар қосуға көмектесетін әдіскер</a:t>
             </a:r>
           </a:p>
           <a:p>
@@ -16964,7 +16798,25 @@
                 <a:cs typeface="GQ Text Bold"/>
                 <a:ea typeface="GQ Text Bold"/>
               </a:rPr>
-              <a:t>дамытуға мен өзім дайынмын.</a:t>
+              <a:t>мұғалімдер керек. Әрі қарай дамытуға мен</a:t>
+            </a:r>
+          </a:p>
+          <a:p>
+            <a:pPr algn="l">
+              <a:lnSpc>
+                <a:spcPts val="2500"/>
+              </a:lnSpc>
+            </a:pPr>
+            <a:r>
+              <a:rPr sz="1900" spc="-34">
+                <a:solidFill>
+                  <a:srgbClr val="EEEBE5"/>
+                </a:solidFill>
+                <a:latin typeface="GQ Text Bold"/>
+                <a:cs typeface="GQ Text Bold"/>
+                <a:ea typeface="GQ Text Bold"/>
+              </a:rPr>
+              <a:t>өзім дайынмын.</a:t>
             </a:r>
           </a:p>
         </p:txBody>
@@ -17087,7 +16939,7 @@
                 <a:cs typeface="GQ Text"/>
                 <a:ea typeface="GQ Text"/>
               </a:rPr>
-              <a:t>5–11 сыныпқа арналған толық курс</a:t>
+              <a:t>Мұғалім өзі тапсырма қосатын бет</a:t>
             </a:r>
           </a:p>
         </p:txBody>
@@ -17169,7 +17021,7 @@
                 <a:cs typeface="GQ Text"/>
                 <a:ea typeface="GQ Text"/>
               </a:rPr>
-              <a:t>Ана тілі иесінің тірі дауысымен жазба</a:t>
+              <a:t>Жаңа тақырыптар: етістік, есімдік, үстеу</a:t>
             </a:r>
           </a:p>
         </p:txBody>
@@ -17251,7 +17103,7 @@
                 <a:cs typeface="GQ Text"/>
                 <a:ea typeface="GQ Text"/>
               </a:rPr>
-              <a:t>Мұғалім кабинеті: сынып, тапсырма, үлгерім</a:t>
+              <a:t>Ана тілі иесінің тірі дауысымен жазба</a:t>
             </a:r>
           </a:p>
         </p:txBody>
@@ -17333,7 +17185,7 @@
                 <a:cs typeface="GQ Text"/>
                 <a:ea typeface="GQ Text"/>
               </a:rPr>
-              <a:t>Орыс тілін оқитын мектептерге нұсқа</a:t>
+              <a:t>Мұғалім кабинеті: сынып, тапсырма, үлгерім</a:t>
             </a:r>
           </a:p>
         </p:txBody>
